--- a/public/fun/pack/pptx/birthday/돌잔치_45_첫번째이야기중심_한지등.pptx
+++ b/public/fun/pack/pptx/birthday/돌잔치_45_첫번째이야기중심_한지등.pptx
@@ -3286,6 +3286,14 @@
 <file path=ppt/slides/slide1.xml><?xml version="1.0" encoding="utf-8"?>
 <p:sld xmlns:a="http://schemas.openxmlformats.org/drawingml/2006/main" xmlns:p="http://schemas.openxmlformats.org/presentationml/2006/main" xmlns:r="http://schemas.openxmlformats.org/officeDocument/2006/relationships">
   <p:cSld>
+    <p:bg>
+      <p:bgPr>
+        <a:solidFill>
+          <a:srgbClr val="F6EAD5"/>
+        </a:solidFill>
+        <a:effectLst/>
+      </p:bgPr>
+    </p:bg>
     <p:spTree>
       <p:nvGrpSpPr>
         <p:cNvPr id="1" name=""/>
@@ -3293,30 +3301,119 @@
         <p:nvPr/>
       </p:nvGrpSpPr>
       <p:grpSpPr/>
-      <p:pic>
-        <p:nvPicPr>
-          <p:cNvPr id="3" name="표지 그림" descr="birthday-45.jpg"/>
-          <p:cNvPicPr>
-            <a:picLocks noChangeAspect="1"/>
-          </p:cNvPicPr>
+      <p:sp>
+        <p:nvSpPr>
+          <p:cNvPr id="3" name="사진 자리"/>
+          <p:cNvSpPr/>
           <p:nvPr/>
-        </p:nvPicPr>
-        <p:blipFill>
-          <a:blip r:embed="rId2"/>
-          <a:stretch>
-            <a:fillRect/>
-          </a:stretch>
-        </p:blipFill>
-        <p:spPr>
-          <a:xfrm>
-            <a:off x="0" y="0"/>
-            <a:ext cx="12191695" cy="6858000"/>
+        </p:nvSpPr>
+        <p:spPr>
+          <a:xfrm>
+            <a:off x="7558851" y="685800"/>
+            <a:ext cx="3169840" cy="5486400"/>
+          </a:xfrm>
+          <a:prstGeom prst="round2SameRect">
+            <a:avLst>
+              <a:gd name="adj1" fmla="val 50000"/>
+              <a:gd name="adj2" fmla="val 0"/>
+            </a:avLst>
+          </a:prstGeom>
+          <a:solidFill>
+            <a:srgbClr val="EBD4AD"/>
+          </a:solidFill>
+          <a:ln>
+            <a:noFill/>
+          </a:ln>
+        </p:spPr>
+        <p:txBody>
+          <a:bodyPr rtlCol="0" anchor="ctr" wrap="square" lIns="54864" rIns="54864" tIns="27432" bIns="27432">
+            <a:noAutofit/>
+          </a:bodyPr>
+          <a:lstStyle/>
+          <a:p>
+            <a:pPr algn="ctr">
+              <a:lnSpc>
+                <a:spcPct val="100000"/>
+              </a:lnSpc>
+            </a:pPr>
+            <a:r>
+              <a:rPr sz="1400" b="0" i="0">
+                <a:solidFill>
+                  <a:srgbClr val="493D27"/>
+                </a:solidFill>
+              </a:rPr>
+              <a:t>사진을 넣어 주세요</a:t>
+            </a:r>
+          </a:p>
+        </p:txBody>
+      </p:sp>
+      <p:sp>
+        <p:nvSpPr>
+          <p:cNvPr id="4" name="장식"/>
+          <p:cNvSpPr/>
+          <p:nvPr/>
+        </p:nvSpPr>
+        <p:spPr>
+          <a:xfrm>
+            <a:off x="6827349" y="4251960"/>
+            <a:ext cx="1005840" cy="1005840"/>
+          </a:xfrm>
+          <a:prstGeom prst="ellipse">
+            <a:avLst/>
+          </a:prstGeom>
+          <a:solidFill>
+            <a:srgbClr val="EBD4AD"/>
+          </a:solidFill>
+          <a:ln>
+            <a:noFill/>
+          </a:ln>
+        </p:spPr>
+        <p:txBody>
+          <a:bodyPr rtlCol="0" anchor="ctr"/>
+          <a:lstStyle/>
+          <a:p>
+            <a:pPr algn="ctr"/>
+          </a:p>
+        </p:txBody>
+      </p:sp>
+      <p:sp>
+        <p:nvSpPr>
+          <p:cNvPr id="5" name="라벨"/>
+          <p:cNvSpPr txBox="1"/>
+          <p:nvPr/>
+        </p:nvSpPr>
+        <p:spPr>
+          <a:xfrm>
+            <a:off x="822960" y="2148840"/>
+            <a:ext cx="5608179" cy="274320"/>
           </a:xfrm>
           <a:prstGeom prst="rect">
             <a:avLst/>
           </a:prstGeom>
-        </p:spPr>
-      </p:pic>
+          <a:noFill/>
+        </p:spPr>
+        <p:txBody>
+          <a:bodyPr wrap="square" lIns="54864" rIns="54864" tIns="27432" bIns="27432" anchor="t">
+            <a:noAutofit/>
+          </a:bodyPr>
+          <a:lstStyle/>
+          <a:p>
+            <a:pPr algn="l">
+              <a:lnSpc>
+                <a:spcPct val="115000"/>
+              </a:lnSpc>
+            </a:pPr>
+            <a:r>
+              <a:rPr sz="1000" b="1" i="0" spc="250">
+                <a:solidFill>
+                  <a:srgbClr val="26231F"/>
+                </a:solidFill>
+              </a:rPr>
+              <a:t>FIRST BIRTHDAY</a:t>
+            </a:r>
+          </a:p>
+        </p:txBody>
+      </p:sp>
       <p:sp>
         <p:nvSpPr>
           <p:cNvPr id="2" name="Title 1"/>
@@ -3329,8 +3426,8 @@
         </p:nvSpPr>
         <p:spPr>
           <a:xfrm>
-            <a:off x="853418" y="2057400"/>
-            <a:ext cx="6095847" cy="1554480"/>
+            <a:off x="822960" y="2606040"/>
+            <a:ext cx="5608179" cy="1188720"/>
           </a:xfrm>
         </p:spPr>
         <p:txBody>
@@ -3347,7 +3444,7 @@
             <a:r>
               <a:rPr sz="4000" b="1" i="0">
                 <a:solidFill>
-                  <a:srgbClr val="7C5D27"/>
+                  <a:srgbClr val="26231F"/>
                 </a:solidFill>
               </a:rPr>
               <a:t>첫 번째 생일</a:t>
@@ -3357,14 +3454,14 @@
       </p:sp>
       <p:sp>
         <p:nvSpPr>
-          <p:cNvPr id="4" name="한 줄 문구"/>
+          <p:cNvPr id="6" name="한 줄 문구"/>
           <p:cNvSpPr txBox="1"/>
           <p:nvPr/>
         </p:nvSpPr>
         <p:spPr>
           <a:xfrm>
-            <a:off x="853418" y="3749039"/>
-            <a:ext cx="6095847" cy="822960"/>
+            <a:off x="822960" y="3886200"/>
+            <a:ext cx="5608179" cy="822960"/>
           </a:xfrm>
           <a:prstGeom prst="rect">
             <a:avLst/>
@@ -3383,9 +3480,9 @@
               </a:lnSpc>
             </a:pPr>
             <a:r>
-              <a:rPr sz="1700" b="0" i="1">
-                <a:solidFill>
-                  <a:srgbClr val="7C5D27"/>
+              <a:rPr sz="1700" b="0" i="0">
+                <a:solidFill>
+                  <a:srgbClr val="26231F"/>
                 </a:solidFill>
               </a:rPr>
               <a:t>첫 눈을 보여 주러 안고 나갔던 날</a:t>
@@ -3395,14 +3492,14 @@
       </p:sp>
       <p:sp>
         <p:nvSpPr>
-          <p:cNvPr id="5" name="안내 문구"/>
+          <p:cNvPr id="7" name="안내 문구"/>
           <p:cNvSpPr txBox="1"/>
           <p:nvPr/>
         </p:nvSpPr>
         <p:spPr>
           <a:xfrm>
-            <a:off x="853418" y="4617720"/>
-            <a:ext cx="6095847" cy="914400"/>
+            <a:off x="822960" y="4754880"/>
+            <a:ext cx="5608179" cy="914400"/>
           </a:xfrm>
           <a:prstGeom prst="rect">
             <a:avLst/>
@@ -3423,10 +3520,10 @@
             <a:r>
               <a:rPr sz="1400" b="0" i="0">
                 <a:solidFill>
-                  <a:srgbClr val="666666"/>
+                  <a:srgbClr val="26231F"/>
                 </a:solidFill>
               </a:rPr>
-              <a:t>아기 이름 · 2027. 00. 00</a:t>
+              <a:t>아기 이름 · 날짜 입력</a:t>
             </a:r>
           </a:p>
           <a:p>
@@ -3438,7 +3535,7 @@
             <a:r>
               <a:rPr sz="1400" b="0" i="0">
                 <a:solidFill>
-                  <a:srgbClr val="666666"/>
+                  <a:srgbClr val="26231F"/>
                 </a:solidFill>
               </a:rPr>
               <a:t>장소를 입력하세요</a:t>
@@ -3460,7 +3557,7 @@
     <p:bg>
       <p:bgPr>
         <a:solidFill>
-          <a:srgbClr val="FAF6EF"/>
+          <a:srgbClr val="FFFFFF"/>
         </a:solidFill>
         <a:effectLst/>
       </p:bgPr>
@@ -3480,14 +3577,14 @@
         </p:nvSpPr>
         <p:spPr>
           <a:xfrm>
-            <a:off x="0" y="0"/>
-            <a:ext cx="12191695" cy="274320"/>
+            <a:off x="0" y="6565392"/>
+            <a:ext cx="12191695" cy="292608"/>
           </a:xfrm>
           <a:prstGeom prst="rect">
             <a:avLst/>
           </a:prstGeom>
           <a:solidFill>
-            <a:srgbClr val="C49645"/>
+            <a:srgbClr val="EBD4AD"/>
           </a:solidFill>
           <a:ln>
             <a:noFill/>
@@ -3509,14 +3606,83 @@
         </p:nvSpPr>
         <p:spPr>
           <a:xfrm>
-            <a:off x="0" y="274320"/>
-            <a:ext cx="12191695" cy="54864"/>
+            <a:off x="640080" y="566928"/>
+            <a:ext cx="64008" cy="868680"/>
+          </a:xfrm>
+          <a:prstGeom prst="roundRect">
+            <a:avLst>
+              <a:gd name="adj" fmla="val 50000"/>
+            </a:avLst>
+          </a:prstGeom>
+          <a:solidFill>
+            <a:srgbClr val="E1C698"/>
+          </a:solidFill>
+          <a:ln>
+            <a:noFill/>
+          </a:ln>
+        </p:spPr>
+        <p:txBody>
+          <a:bodyPr rtlCol="0" anchor="ctr"/>
+          <a:lstStyle/>
+          <a:p>
+            <a:pPr algn="ctr"/>
+          </a:p>
+        </p:txBody>
+      </p:sp>
+      <p:sp>
+        <p:nvSpPr>
+          <p:cNvPr id="5" name="상단 라벨"/>
+          <p:cNvSpPr txBox="1"/>
+          <p:nvPr/>
+        </p:nvSpPr>
+        <p:spPr>
+          <a:xfrm>
+            <a:off x="868680" y="274320"/>
+            <a:ext cx="5486400" cy="274320"/>
           </a:xfrm>
           <a:prstGeom prst="rect">
             <a:avLst/>
           </a:prstGeom>
+          <a:noFill/>
+        </p:spPr>
+        <p:txBody>
+          <a:bodyPr wrap="square" lIns="54864" rIns="54864" tIns="27432" bIns="27432" anchor="ctr">
+            <a:noAutofit/>
+          </a:bodyPr>
+          <a:lstStyle/>
+          <a:p>
+            <a:pPr algn="l">
+              <a:lnSpc>
+                <a:spcPct val="115000"/>
+              </a:lnSpc>
+            </a:pPr>
+            <a:r>
+              <a:rPr sz="900" b="1" i="0" spc="250">
+                <a:solidFill>
+                  <a:srgbClr val="8E8780"/>
+                </a:solidFill>
+              </a:rPr>
+              <a:t>FIRST BIRTHDAY</a:t>
+            </a:r>
+          </a:p>
+        </p:txBody>
+      </p:sp>
+      <p:sp>
+        <p:nvSpPr>
+          <p:cNvPr id="6" name="포인트"/>
+          <p:cNvSpPr/>
+          <p:nvPr/>
+        </p:nvSpPr>
+        <p:spPr>
+          <a:xfrm>
+            <a:off x="11167567" y="667512"/>
+            <a:ext cx="310896" cy="310896"/>
+          </a:xfrm>
+          <a:prstGeom prst="sun">
+            <a:avLst/>
+          </a:prstGeom>
           <a:solidFill>
-            <a:srgbClr val="3B8591"/>
+            <a:srgbClr val="EBD4AD"/>
           </a:solidFill>
           <a:ln>
             <a:noFill/>
@@ -3542,8 +3708,8 @@
         </p:nvSpPr>
         <p:spPr>
           <a:xfrm>
-            <a:off x="640080" y="457200"/>
-            <a:ext cx="9722815" cy="868680"/>
+            <a:off x="868680" y="566928"/>
+            <a:ext cx="9448495" cy="868680"/>
           </a:xfrm>
         </p:spPr>
         <p:txBody>
@@ -3560,7 +3726,7 @@
             <a:r>
               <a:rPr sz="3000" b="1" i="0">
                 <a:solidFill>
-                  <a:srgbClr val="7C5D27"/>
+                  <a:srgbClr val="26231F"/>
                 </a:solidFill>
               </a:rPr>
               <a:t>우리 아기를 소개합니다</a:t>
@@ -3570,14 +3736,14 @@
       </p:sp>
       <p:sp>
         <p:nvSpPr>
-          <p:cNvPr id="5" name="사진 자리"/>
+          <p:cNvPr id="7" name="사진 자리"/>
           <p:cNvSpPr/>
           <p:nvPr/>
         </p:nvSpPr>
         <p:spPr>
           <a:xfrm>
-            <a:off x="640080" y="1600200"/>
-            <a:ext cx="3840480" cy="4617720"/>
+            <a:off x="640080" y="1783080"/>
+            <a:ext cx="3840480" cy="4206240"/>
           </a:xfrm>
           <a:prstGeom prst="roundRect">
             <a:avLst>
@@ -3585,12 +3751,10 @@
             </a:avLst>
           </a:prstGeom>
           <a:solidFill>
-            <a:srgbClr val="F2E5CF"/>
+            <a:srgbClr val="F6EAD5"/>
           </a:solidFill>
           <a:ln w="19050">
-            <a:solidFill>
-              <a:srgbClr val="C49645"/>
-            </a:solidFill>
+            <a:noFill/>
             <a:prstDash val="dash"/>
           </a:ln>
         </p:spPr>
@@ -3608,7 +3772,7 @@
             <a:r>
               <a:rPr sz="1400" b="0" i="0">
                 <a:solidFill>
-                  <a:srgbClr val="7C5D27"/>
+                  <a:srgbClr val="8E8780"/>
                 </a:solidFill>
               </a:rPr>
               <a:t>아기 사진을 넣어 주세요</a:t>
@@ -3618,14 +3782,14 @@
       </p:sp>
       <p:graphicFrame>
         <p:nvGraphicFramePr>
-          <p:cNvPr id="6" name="표"/>
+          <p:cNvPr id="8" name="표"/>
           <p:cNvGraphicFramePr>
             <a:graphicFrameLocks noGrp="1"/>
           </p:cNvGraphicFramePr>
           <p:nvPr/>
         </p:nvGraphicFramePr>
         <p:xfrm>
-          <a:off x="4846320" y="1600200"/>
+          <a:off x="4846320" y="1783080"/>
           <a:ext cx="6705295" cy="3950208"/>
         </p:xfrm>
         <a:graphic>
@@ -3648,7 +3812,7 @@
                       <a:r>
                         <a:rPr sz="1500" b="1">
                           <a:solidFill>
-                            <a:srgbClr val="7C5D27"/>
+                            <a:srgbClr val="493D27"/>
                           </a:solidFill>
                         </a:rPr>
                         <a:t>이름</a:t>
@@ -3658,30 +3822,30 @@
                   <a:tcPr anchor="ctr" marL="73152" marR="73152">
                     <a:lnL w="9525" cap="flat" cmpd="sng" algn="ctr">
                       <a:solidFill>
-                        <a:srgbClr val="F2E5CF"/>
+                        <a:srgbClr val="F6EAD5"/>
                       </a:solidFill>
                       <a:prstDash val="solid"/>
                     </a:lnL>
                     <a:lnR w="9525" cap="flat" cmpd="sng" algn="ctr">
                       <a:solidFill>
-                        <a:srgbClr val="F2E5CF"/>
+                        <a:srgbClr val="F6EAD5"/>
                       </a:solidFill>
                       <a:prstDash val="solid"/>
                     </a:lnR>
                     <a:lnT w="9525" cap="flat" cmpd="sng" algn="ctr">
                       <a:solidFill>
-                        <a:srgbClr val="F2E5CF"/>
+                        <a:srgbClr val="F6EAD5"/>
                       </a:solidFill>
                       <a:prstDash val="solid"/>
                     </a:lnT>
                     <a:lnB w="9525" cap="flat" cmpd="sng" algn="ctr">
                       <a:solidFill>
-                        <a:srgbClr val="F2E5CF"/>
+                        <a:srgbClr val="F6EAD5"/>
                       </a:solidFill>
                       <a:prstDash val="solid"/>
                     </a:lnB>
                     <a:solidFill>
-                      <a:srgbClr val="F2E5CF"/>
+                      <a:srgbClr val="F6EAD5"/>
                     </a:solidFill>
                   </a:tcPr>
                 </a:tc>
@@ -3694,7 +3858,7 @@
                       <a:r>
                         <a:rPr sz="1500" b="0">
                           <a:solidFill>
-                            <a:srgbClr val="2B2B2B"/>
+                            <a:srgbClr val="26231F"/>
                           </a:solidFill>
                         </a:rPr>
                         <a:t>입력하세요</a:t>
@@ -3704,30 +3868,30 @@
                   <a:tcPr anchor="ctr" marL="73152" marR="73152">
                     <a:lnL w="9525" cap="flat" cmpd="sng" algn="ctr">
                       <a:solidFill>
-                        <a:srgbClr val="F2E5CF"/>
+                        <a:srgbClr val="F6EAD5"/>
                       </a:solidFill>
                       <a:prstDash val="solid"/>
                     </a:lnL>
                     <a:lnR w="9525" cap="flat" cmpd="sng" algn="ctr">
                       <a:solidFill>
-                        <a:srgbClr val="F2E5CF"/>
+                        <a:srgbClr val="F6EAD5"/>
                       </a:solidFill>
                       <a:prstDash val="solid"/>
                     </a:lnR>
                     <a:lnT w="9525" cap="flat" cmpd="sng" algn="ctr">
                       <a:solidFill>
-                        <a:srgbClr val="F2E5CF"/>
+                        <a:srgbClr val="F6EAD5"/>
                       </a:solidFill>
                       <a:prstDash val="solid"/>
                     </a:lnT>
                     <a:lnB w="9525" cap="flat" cmpd="sng" algn="ctr">
                       <a:solidFill>
-                        <a:srgbClr val="F2E5CF"/>
+                        <a:srgbClr val="F6EAD5"/>
                       </a:solidFill>
                       <a:prstDash val="solid"/>
                     </a:lnB>
                     <a:solidFill>
-                      <a:srgbClr val="FAF6EF"/>
+                      <a:srgbClr val="FBF6EC"/>
                     </a:solidFill>
                   </a:tcPr>
                 </a:tc>
@@ -3742,7 +3906,7 @@
                       <a:r>
                         <a:rPr sz="1500" b="1">
                           <a:solidFill>
-                            <a:srgbClr val="7C5D27"/>
+                            <a:srgbClr val="493D27"/>
                           </a:solidFill>
                         </a:rPr>
                         <a:t>생일</a:t>
@@ -3752,30 +3916,30 @@
                   <a:tcPr anchor="ctr" marL="73152" marR="73152">
                     <a:lnL w="9525" cap="flat" cmpd="sng" algn="ctr">
                       <a:solidFill>
-                        <a:srgbClr val="F2E5CF"/>
+                        <a:srgbClr val="F6EAD5"/>
                       </a:solidFill>
                       <a:prstDash val="solid"/>
                     </a:lnL>
                     <a:lnR w="9525" cap="flat" cmpd="sng" algn="ctr">
                       <a:solidFill>
-                        <a:srgbClr val="F2E5CF"/>
+                        <a:srgbClr val="F6EAD5"/>
                       </a:solidFill>
                       <a:prstDash val="solid"/>
                     </a:lnR>
                     <a:lnT w="9525" cap="flat" cmpd="sng" algn="ctr">
                       <a:solidFill>
-                        <a:srgbClr val="F2E5CF"/>
+                        <a:srgbClr val="F6EAD5"/>
                       </a:solidFill>
                       <a:prstDash val="solid"/>
                     </a:lnT>
                     <a:lnB w="9525" cap="flat" cmpd="sng" algn="ctr">
                       <a:solidFill>
-                        <a:srgbClr val="F2E5CF"/>
+                        <a:srgbClr val="F6EAD5"/>
                       </a:solidFill>
                       <a:prstDash val="solid"/>
                     </a:lnB>
                     <a:solidFill>
-                      <a:srgbClr val="F2E5CF"/>
+                      <a:srgbClr val="F6EAD5"/>
                     </a:solidFill>
                   </a:tcPr>
                 </a:tc>
@@ -3788,7 +3952,7 @@
                       <a:r>
                         <a:rPr sz="1500" b="0">
                           <a:solidFill>
-                            <a:srgbClr val="2B2B2B"/>
+                            <a:srgbClr val="26231F"/>
                           </a:solidFill>
                         </a:rPr>
                         <a:t>입력하세요</a:t>
@@ -3798,25 +3962,25 @@
                   <a:tcPr anchor="ctr" marL="73152" marR="73152">
                     <a:lnL w="9525" cap="flat" cmpd="sng" algn="ctr">
                       <a:solidFill>
-                        <a:srgbClr val="F2E5CF"/>
+                        <a:srgbClr val="F6EAD5"/>
                       </a:solidFill>
                       <a:prstDash val="solid"/>
                     </a:lnL>
                     <a:lnR w="9525" cap="flat" cmpd="sng" algn="ctr">
                       <a:solidFill>
-                        <a:srgbClr val="F2E5CF"/>
+                        <a:srgbClr val="F6EAD5"/>
                       </a:solidFill>
                       <a:prstDash val="solid"/>
                     </a:lnR>
                     <a:lnT w="9525" cap="flat" cmpd="sng" algn="ctr">
                       <a:solidFill>
-                        <a:srgbClr val="F2E5CF"/>
+                        <a:srgbClr val="F6EAD5"/>
                       </a:solidFill>
                       <a:prstDash val="solid"/>
                     </a:lnT>
                     <a:lnB w="9525" cap="flat" cmpd="sng" algn="ctr">
                       <a:solidFill>
-                        <a:srgbClr val="F2E5CF"/>
+                        <a:srgbClr val="F6EAD5"/>
                       </a:solidFill>
                       <a:prstDash val="solid"/>
                     </a:lnB>
@@ -3836,7 +4000,7 @@
                       <a:r>
                         <a:rPr sz="1500" b="1">
                           <a:solidFill>
-                            <a:srgbClr val="7C5D27"/>
+                            <a:srgbClr val="493D27"/>
                           </a:solidFill>
                         </a:rPr>
                         <a:t>키 · 몸무게</a:t>
@@ -3846,30 +4010,30 @@
                   <a:tcPr anchor="ctr" marL="73152" marR="73152">
                     <a:lnL w="9525" cap="flat" cmpd="sng" algn="ctr">
                       <a:solidFill>
-                        <a:srgbClr val="F2E5CF"/>
+                        <a:srgbClr val="F6EAD5"/>
                       </a:solidFill>
                       <a:prstDash val="solid"/>
                     </a:lnL>
                     <a:lnR w="9525" cap="flat" cmpd="sng" algn="ctr">
                       <a:solidFill>
-                        <a:srgbClr val="F2E5CF"/>
+                        <a:srgbClr val="F6EAD5"/>
                       </a:solidFill>
                       <a:prstDash val="solid"/>
                     </a:lnR>
                     <a:lnT w="9525" cap="flat" cmpd="sng" algn="ctr">
                       <a:solidFill>
-                        <a:srgbClr val="F2E5CF"/>
+                        <a:srgbClr val="F6EAD5"/>
                       </a:solidFill>
                       <a:prstDash val="solid"/>
                     </a:lnT>
                     <a:lnB w="9525" cap="flat" cmpd="sng" algn="ctr">
                       <a:solidFill>
-                        <a:srgbClr val="F2E5CF"/>
+                        <a:srgbClr val="F6EAD5"/>
                       </a:solidFill>
                       <a:prstDash val="solid"/>
                     </a:lnB>
                     <a:solidFill>
-                      <a:srgbClr val="F2E5CF"/>
+                      <a:srgbClr val="F6EAD5"/>
                     </a:solidFill>
                   </a:tcPr>
                 </a:tc>
@@ -3882,7 +4046,7 @@
                       <a:r>
                         <a:rPr sz="1500" b="0">
                           <a:solidFill>
-                            <a:srgbClr val="2B2B2B"/>
+                            <a:srgbClr val="26231F"/>
                           </a:solidFill>
                         </a:rPr>
                         <a:t>입력하세요</a:t>
@@ -3892,30 +4056,30 @@
                   <a:tcPr anchor="ctr" marL="73152" marR="73152">
                     <a:lnL w="9525" cap="flat" cmpd="sng" algn="ctr">
                       <a:solidFill>
-                        <a:srgbClr val="F2E5CF"/>
+                        <a:srgbClr val="F6EAD5"/>
                       </a:solidFill>
                       <a:prstDash val="solid"/>
                     </a:lnL>
                     <a:lnR w="9525" cap="flat" cmpd="sng" algn="ctr">
                       <a:solidFill>
-                        <a:srgbClr val="F2E5CF"/>
+                        <a:srgbClr val="F6EAD5"/>
                       </a:solidFill>
                       <a:prstDash val="solid"/>
                     </a:lnR>
                     <a:lnT w="9525" cap="flat" cmpd="sng" algn="ctr">
                       <a:solidFill>
-                        <a:srgbClr val="F2E5CF"/>
+                        <a:srgbClr val="F6EAD5"/>
                       </a:solidFill>
                       <a:prstDash val="solid"/>
                     </a:lnT>
                     <a:lnB w="9525" cap="flat" cmpd="sng" algn="ctr">
                       <a:solidFill>
-                        <a:srgbClr val="F2E5CF"/>
+                        <a:srgbClr val="F6EAD5"/>
                       </a:solidFill>
                       <a:prstDash val="solid"/>
                     </a:lnB>
                     <a:solidFill>
-                      <a:srgbClr val="FAF6EF"/>
+                      <a:srgbClr val="FBF6EC"/>
                     </a:solidFill>
                   </a:tcPr>
                 </a:tc>
@@ -3930,7 +4094,7 @@
                       <a:r>
                         <a:rPr sz="1500" b="1">
                           <a:solidFill>
-                            <a:srgbClr val="7C5D27"/>
+                            <a:srgbClr val="493D27"/>
                           </a:solidFill>
                         </a:rPr>
                         <a:t>좋아하는 것</a:t>
@@ -3940,30 +4104,30 @@
                   <a:tcPr anchor="ctr" marL="73152" marR="73152">
                     <a:lnL w="9525" cap="flat" cmpd="sng" algn="ctr">
                       <a:solidFill>
-                        <a:srgbClr val="F2E5CF"/>
+                        <a:srgbClr val="F6EAD5"/>
                       </a:solidFill>
                       <a:prstDash val="solid"/>
                     </a:lnL>
                     <a:lnR w="9525" cap="flat" cmpd="sng" algn="ctr">
                       <a:solidFill>
-                        <a:srgbClr val="F2E5CF"/>
+                        <a:srgbClr val="F6EAD5"/>
                       </a:solidFill>
                       <a:prstDash val="solid"/>
                     </a:lnR>
                     <a:lnT w="9525" cap="flat" cmpd="sng" algn="ctr">
                       <a:solidFill>
-                        <a:srgbClr val="F2E5CF"/>
+                        <a:srgbClr val="F6EAD5"/>
                       </a:solidFill>
                       <a:prstDash val="solid"/>
                     </a:lnT>
                     <a:lnB w="9525" cap="flat" cmpd="sng" algn="ctr">
                       <a:solidFill>
-                        <a:srgbClr val="F2E5CF"/>
+                        <a:srgbClr val="F6EAD5"/>
                       </a:solidFill>
                       <a:prstDash val="solid"/>
                     </a:lnB>
                     <a:solidFill>
-                      <a:srgbClr val="F2E5CF"/>
+                      <a:srgbClr val="F6EAD5"/>
                     </a:solidFill>
                   </a:tcPr>
                 </a:tc>
@@ -3976,7 +4140,7 @@
                       <a:r>
                         <a:rPr sz="1500" b="0">
                           <a:solidFill>
-                            <a:srgbClr val="2B2B2B"/>
+                            <a:srgbClr val="26231F"/>
                           </a:solidFill>
                         </a:rPr>
                         <a:t>입력하세요</a:t>
@@ -3986,25 +4150,25 @@
                   <a:tcPr anchor="ctr" marL="73152" marR="73152">
                     <a:lnL w="9525" cap="flat" cmpd="sng" algn="ctr">
                       <a:solidFill>
-                        <a:srgbClr val="F2E5CF"/>
+                        <a:srgbClr val="F6EAD5"/>
                       </a:solidFill>
                       <a:prstDash val="solid"/>
                     </a:lnL>
                     <a:lnR w="9525" cap="flat" cmpd="sng" algn="ctr">
                       <a:solidFill>
-                        <a:srgbClr val="F2E5CF"/>
+                        <a:srgbClr val="F6EAD5"/>
                       </a:solidFill>
                       <a:prstDash val="solid"/>
                     </a:lnR>
                     <a:lnT w="9525" cap="flat" cmpd="sng" algn="ctr">
                       <a:solidFill>
-                        <a:srgbClr val="F2E5CF"/>
+                        <a:srgbClr val="F6EAD5"/>
                       </a:solidFill>
                       <a:prstDash val="solid"/>
                     </a:lnT>
                     <a:lnB w="9525" cap="flat" cmpd="sng" algn="ctr">
                       <a:solidFill>
-                        <a:srgbClr val="F2E5CF"/>
+                        <a:srgbClr val="F6EAD5"/>
                       </a:solidFill>
                       <a:prstDash val="solid"/>
                     </a:lnB>
@@ -4024,7 +4188,7 @@
                       <a:r>
                         <a:rPr sz="1500" b="1">
                           <a:solidFill>
-                            <a:srgbClr val="7C5D27"/>
+                            <a:srgbClr val="493D27"/>
                           </a:solidFill>
                         </a:rPr>
                         <a:t>별명</a:t>
@@ -4034,30 +4198,30 @@
                   <a:tcPr anchor="ctr" marL="73152" marR="73152">
                     <a:lnL w="9525" cap="flat" cmpd="sng" algn="ctr">
                       <a:solidFill>
-                        <a:srgbClr val="F2E5CF"/>
+                        <a:srgbClr val="F6EAD5"/>
                       </a:solidFill>
                       <a:prstDash val="solid"/>
                     </a:lnL>
                     <a:lnR w="9525" cap="flat" cmpd="sng" algn="ctr">
                       <a:solidFill>
-                        <a:srgbClr val="F2E5CF"/>
+                        <a:srgbClr val="F6EAD5"/>
                       </a:solidFill>
                       <a:prstDash val="solid"/>
                     </a:lnR>
                     <a:lnT w="9525" cap="flat" cmpd="sng" algn="ctr">
                       <a:solidFill>
-                        <a:srgbClr val="F2E5CF"/>
+                        <a:srgbClr val="F6EAD5"/>
                       </a:solidFill>
                       <a:prstDash val="solid"/>
                     </a:lnT>
                     <a:lnB w="9525" cap="flat" cmpd="sng" algn="ctr">
                       <a:solidFill>
-                        <a:srgbClr val="F2E5CF"/>
+                        <a:srgbClr val="F6EAD5"/>
                       </a:solidFill>
                       <a:prstDash val="solid"/>
                     </a:lnB>
                     <a:solidFill>
-                      <a:srgbClr val="F2E5CF"/>
+                      <a:srgbClr val="F6EAD5"/>
                     </a:solidFill>
                   </a:tcPr>
                 </a:tc>
@@ -4070,7 +4234,7 @@
                       <a:r>
                         <a:rPr sz="1500" b="0">
                           <a:solidFill>
-                            <a:srgbClr val="2B2B2B"/>
+                            <a:srgbClr val="26231F"/>
                           </a:solidFill>
                         </a:rPr>
                         <a:t>입력하세요</a:t>
@@ -4080,30 +4244,30 @@
                   <a:tcPr anchor="ctr" marL="73152" marR="73152">
                     <a:lnL w="9525" cap="flat" cmpd="sng" algn="ctr">
                       <a:solidFill>
-                        <a:srgbClr val="F2E5CF"/>
+                        <a:srgbClr val="F6EAD5"/>
                       </a:solidFill>
                       <a:prstDash val="solid"/>
                     </a:lnL>
                     <a:lnR w="9525" cap="flat" cmpd="sng" algn="ctr">
                       <a:solidFill>
-                        <a:srgbClr val="F2E5CF"/>
+                        <a:srgbClr val="F6EAD5"/>
                       </a:solidFill>
                       <a:prstDash val="solid"/>
                     </a:lnR>
                     <a:lnT w="9525" cap="flat" cmpd="sng" algn="ctr">
                       <a:solidFill>
-                        <a:srgbClr val="F2E5CF"/>
+                        <a:srgbClr val="F6EAD5"/>
                       </a:solidFill>
                       <a:prstDash val="solid"/>
                     </a:lnT>
                     <a:lnB w="9525" cap="flat" cmpd="sng" algn="ctr">
                       <a:solidFill>
-                        <a:srgbClr val="F2E5CF"/>
+                        <a:srgbClr val="F6EAD5"/>
                       </a:solidFill>
                       <a:prstDash val="solid"/>
                     </a:lnB>
                     <a:solidFill>
-                      <a:srgbClr val="FAF6EF"/>
+                      <a:srgbClr val="FBF6EC"/>
                     </a:solidFill>
                   </a:tcPr>
                 </a:tc>
@@ -4118,7 +4282,7 @@
                       <a:r>
                         <a:rPr sz="1500" b="1">
                           <a:solidFill>
-                            <a:srgbClr val="7C5D27"/>
+                            <a:srgbClr val="493D27"/>
                           </a:solidFill>
                         </a:rPr>
                         <a:t>부모의 마음</a:t>
@@ -4128,30 +4292,30 @@
                   <a:tcPr anchor="ctr" marL="73152" marR="73152">
                     <a:lnL w="9525" cap="flat" cmpd="sng" algn="ctr">
                       <a:solidFill>
-                        <a:srgbClr val="F2E5CF"/>
+                        <a:srgbClr val="F6EAD5"/>
                       </a:solidFill>
                       <a:prstDash val="solid"/>
                     </a:lnL>
                     <a:lnR w="9525" cap="flat" cmpd="sng" algn="ctr">
                       <a:solidFill>
-                        <a:srgbClr val="F2E5CF"/>
+                        <a:srgbClr val="F6EAD5"/>
                       </a:solidFill>
                       <a:prstDash val="solid"/>
                     </a:lnR>
                     <a:lnT w="9525" cap="flat" cmpd="sng" algn="ctr">
                       <a:solidFill>
-                        <a:srgbClr val="F2E5CF"/>
+                        <a:srgbClr val="F6EAD5"/>
                       </a:solidFill>
                       <a:prstDash val="solid"/>
                     </a:lnT>
                     <a:lnB w="9525" cap="flat" cmpd="sng" algn="ctr">
                       <a:solidFill>
-                        <a:srgbClr val="F2E5CF"/>
+                        <a:srgbClr val="F6EAD5"/>
                       </a:solidFill>
                       <a:prstDash val="solid"/>
                     </a:lnB>
                     <a:solidFill>
-                      <a:srgbClr val="F2E5CF"/>
+                      <a:srgbClr val="F6EAD5"/>
                     </a:solidFill>
                   </a:tcPr>
                 </a:tc>
@@ -4164,7 +4328,7 @@
                       <a:r>
                         <a:rPr sz="1500" b="0">
                           <a:solidFill>
-                            <a:srgbClr val="2B2B2B"/>
+                            <a:srgbClr val="26231F"/>
                           </a:solidFill>
                         </a:rPr>
                         <a:t>입력하세요</a:t>
@@ -4174,25 +4338,25 @@
                   <a:tcPr anchor="ctr" marL="73152" marR="73152">
                     <a:lnL w="9525" cap="flat" cmpd="sng" algn="ctr">
                       <a:solidFill>
-                        <a:srgbClr val="F2E5CF"/>
+                        <a:srgbClr val="F6EAD5"/>
                       </a:solidFill>
                       <a:prstDash val="solid"/>
                     </a:lnL>
                     <a:lnR w="9525" cap="flat" cmpd="sng" algn="ctr">
                       <a:solidFill>
-                        <a:srgbClr val="F2E5CF"/>
+                        <a:srgbClr val="F6EAD5"/>
                       </a:solidFill>
                       <a:prstDash val="solid"/>
                     </a:lnR>
                     <a:lnT w="9525" cap="flat" cmpd="sng" algn="ctr">
                       <a:solidFill>
-                        <a:srgbClr val="F2E5CF"/>
+                        <a:srgbClr val="F6EAD5"/>
                       </a:solidFill>
                       <a:prstDash val="solid"/>
                     </a:lnT>
                     <a:lnB w="9525" cap="flat" cmpd="sng" algn="ctr">
                       <a:solidFill>
-                        <a:srgbClr val="F2E5CF"/>
+                        <a:srgbClr val="F6EAD5"/>
                       </a:solidFill>
                       <a:prstDash val="solid"/>
                     </a:lnB>
@@ -4220,7 +4384,7 @@
     <p:bg>
       <p:bgPr>
         <a:solidFill>
-          <a:srgbClr val="FAF6EF"/>
+          <a:srgbClr val="FFFFFF"/>
         </a:solidFill>
         <a:effectLst/>
       </p:bgPr>
@@ -4240,14 +4404,14 @@
         </p:nvSpPr>
         <p:spPr>
           <a:xfrm>
-            <a:off x="0" y="0"/>
-            <a:ext cx="12191695" cy="274320"/>
+            <a:off x="0" y="6565392"/>
+            <a:ext cx="12191695" cy="292608"/>
           </a:xfrm>
           <a:prstGeom prst="rect">
             <a:avLst/>
           </a:prstGeom>
           <a:solidFill>
-            <a:srgbClr val="C49645"/>
+            <a:srgbClr val="EBD4AD"/>
           </a:solidFill>
           <a:ln>
             <a:noFill/>
@@ -4269,14 +4433,83 @@
         </p:nvSpPr>
         <p:spPr>
           <a:xfrm>
-            <a:off x="0" y="274320"/>
-            <a:ext cx="12191695" cy="54864"/>
+            <a:off x="640080" y="566928"/>
+            <a:ext cx="64008" cy="868680"/>
+          </a:xfrm>
+          <a:prstGeom prst="roundRect">
+            <a:avLst>
+              <a:gd name="adj" fmla="val 50000"/>
+            </a:avLst>
+          </a:prstGeom>
+          <a:solidFill>
+            <a:srgbClr val="E1C698"/>
+          </a:solidFill>
+          <a:ln>
+            <a:noFill/>
+          </a:ln>
+        </p:spPr>
+        <p:txBody>
+          <a:bodyPr rtlCol="0" anchor="ctr"/>
+          <a:lstStyle/>
+          <a:p>
+            <a:pPr algn="ctr"/>
+          </a:p>
+        </p:txBody>
+      </p:sp>
+      <p:sp>
+        <p:nvSpPr>
+          <p:cNvPr id="5" name="상단 라벨"/>
+          <p:cNvSpPr txBox="1"/>
+          <p:nvPr/>
+        </p:nvSpPr>
+        <p:spPr>
+          <a:xfrm>
+            <a:off x="868680" y="274320"/>
+            <a:ext cx="5486400" cy="274320"/>
           </a:xfrm>
           <a:prstGeom prst="rect">
             <a:avLst/>
           </a:prstGeom>
+          <a:noFill/>
+        </p:spPr>
+        <p:txBody>
+          <a:bodyPr wrap="square" lIns="54864" rIns="54864" tIns="27432" bIns="27432" anchor="ctr">
+            <a:noAutofit/>
+          </a:bodyPr>
+          <a:lstStyle/>
+          <a:p>
+            <a:pPr algn="l">
+              <a:lnSpc>
+                <a:spcPct val="115000"/>
+              </a:lnSpc>
+            </a:pPr>
+            <a:r>
+              <a:rPr sz="900" b="1" i="0" spc="250">
+                <a:solidFill>
+                  <a:srgbClr val="8E8780"/>
+                </a:solidFill>
+              </a:rPr>
+              <a:t>FIRST BIRTHDAY</a:t>
+            </a:r>
+          </a:p>
+        </p:txBody>
+      </p:sp>
+      <p:sp>
+        <p:nvSpPr>
+          <p:cNvPr id="6" name="포인트"/>
+          <p:cNvSpPr/>
+          <p:nvPr/>
+        </p:nvSpPr>
+        <p:spPr>
+          <a:xfrm>
+            <a:off x="11167567" y="667512"/>
+            <a:ext cx="310896" cy="310896"/>
+          </a:xfrm>
+          <a:prstGeom prst="sun">
+            <a:avLst/>
+          </a:prstGeom>
           <a:solidFill>
-            <a:srgbClr val="3B8591"/>
+            <a:srgbClr val="EBD4AD"/>
           </a:solidFill>
           <a:ln>
             <a:noFill/>
@@ -4302,8 +4535,8 @@
         </p:nvSpPr>
         <p:spPr>
           <a:xfrm>
-            <a:off x="640080" y="457200"/>
-            <a:ext cx="9722815" cy="868680"/>
+            <a:off x="868680" y="566928"/>
+            <a:ext cx="9448495" cy="868680"/>
           </a:xfrm>
         </p:spPr>
         <p:txBody>
@@ -4320,7 +4553,7 @@
             <a:r>
               <a:rPr sz="3000" b="1" i="0">
                 <a:solidFill>
-                  <a:srgbClr val="7C5D27"/>
+                  <a:srgbClr val="26231F"/>
                 </a:solidFill>
               </a:rPr>
               <a:t>태어난 날 이야기</a:t>
@@ -4330,20 +4563,20 @@
       </p:sp>
       <p:sp>
         <p:nvSpPr>
-          <p:cNvPr id="5" name="타임라인 선"/>
+          <p:cNvPr id="7" name="타임라인 선"/>
           <p:cNvSpPr/>
           <p:nvPr/>
         </p:nvSpPr>
         <p:spPr>
           <a:xfrm>
-            <a:off x="640080" y="3337560"/>
+            <a:off x="640080" y="3520440"/>
             <a:ext cx="10911535" cy="54864"/>
           </a:xfrm>
           <a:prstGeom prst="rect">
             <a:avLst/>
           </a:prstGeom>
           <a:solidFill>
-            <a:srgbClr val="F2E5CF"/>
+            <a:srgbClr val="F6EAD5"/>
           </a:solidFill>
           <a:ln>
             <a:noFill/>
@@ -4359,20 +4592,20 @@
       </p:sp>
       <p:sp>
         <p:nvSpPr>
-          <p:cNvPr id="6" name="때 1"/>
+          <p:cNvPr id="8" name="때 1"/>
           <p:cNvSpPr/>
           <p:nvPr/>
         </p:nvSpPr>
         <p:spPr>
           <a:xfrm>
-            <a:off x="1802853" y="3154680"/>
+            <a:off x="1802853" y="3337560"/>
             <a:ext cx="402336" cy="402336"/>
           </a:xfrm>
           <a:prstGeom prst="ellipse">
             <a:avLst/>
           </a:prstGeom>
           <a:solidFill>
-            <a:srgbClr val="C49645"/>
+            <a:srgbClr val="E1C698"/>
           </a:solidFill>
           <a:ln w="38100">
             <a:solidFill>
@@ -4390,13 +4623,13 @@
       </p:sp>
       <p:sp>
         <p:nvSpPr>
-          <p:cNvPr id="7" name="TextBox 6"/>
+          <p:cNvPr id="9" name="TextBox 8"/>
           <p:cNvSpPr txBox="1"/>
           <p:nvPr/>
         </p:nvSpPr>
         <p:spPr>
           <a:xfrm>
-            <a:off x="685800" y="2514600"/>
+            <a:off x="685800" y="2697480"/>
             <a:ext cx="2636443" cy="457200"/>
           </a:xfrm>
           <a:prstGeom prst="rect">
@@ -4418,7 +4651,7 @@
             <a:r>
               <a:rPr sz="1600" b="1" i="0">
                 <a:solidFill>
-                  <a:srgbClr val="C49645"/>
+                  <a:srgbClr val="E1C698"/>
                 </a:solidFill>
               </a:rPr>
               <a:t>임신</a:t>
@@ -4428,13 +4661,13 @@
       </p:sp>
       <p:sp>
         <p:nvSpPr>
-          <p:cNvPr id="8" name="TextBox 7"/>
+          <p:cNvPr id="10" name="TextBox 9"/>
           <p:cNvSpPr txBox="1"/>
           <p:nvPr/>
         </p:nvSpPr>
         <p:spPr>
           <a:xfrm>
-            <a:off x="731519" y="3703320"/>
+            <a:off x="731519" y="3886200"/>
             <a:ext cx="2545003" cy="457200"/>
           </a:xfrm>
           <a:prstGeom prst="rect">
@@ -4456,7 +4689,7 @@
             <a:r>
               <a:rPr sz="1800" b="1" i="0">
                 <a:solidFill>
-                  <a:srgbClr val="7C5D27"/>
+                  <a:srgbClr val="493D27"/>
                 </a:solidFill>
               </a:rPr>
               <a:t>소식을 들은 날</a:t>
@@ -4466,13 +4699,13 @@
       </p:sp>
       <p:sp>
         <p:nvSpPr>
-          <p:cNvPr id="9" name="TextBox 8"/>
+          <p:cNvPr id="11" name="TextBox 10"/>
           <p:cNvSpPr txBox="1"/>
           <p:nvPr/>
         </p:nvSpPr>
         <p:spPr>
           <a:xfrm>
-            <a:off x="731519" y="4206240"/>
+            <a:off x="731519" y="4389120"/>
             <a:ext cx="2545003" cy="1645920"/>
           </a:xfrm>
           <a:prstGeom prst="rect">
@@ -4494,7 +4727,7 @@
             <a:r>
               <a:rPr sz="1500" b="0" i="0">
                 <a:solidFill>
-                  <a:srgbClr val="2B2B2B"/>
+                  <a:srgbClr val="26231F"/>
                 </a:solidFill>
               </a:rPr>
               <a:t>기억을 적어 주세요</a:t>
@@ -4504,20 +4737,20 @@
       </p:sp>
       <p:sp>
         <p:nvSpPr>
-          <p:cNvPr id="10" name="때 2"/>
+          <p:cNvPr id="12" name="때 2"/>
           <p:cNvSpPr/>
           <p:nvPr/>
         </p:nvSpPr>
         <p:spPr>
           <a:xfrm>
-            <a:off x="4530737" y="3154680"/>
+            <a:off x="4530737" y="3337560"/>
             <a:ext cx="402336" cy="402336"/>
           </a:xfrm>
           <a:prstGeom prst="ellipse">
             <a:avLst/>
           </a:prstGeom>
           <a:solidFill>
-            <a:srgbClr val="C49645"/>
+            <a:srgbClr val="E1C698"/>
           </a:solidFill>
           <a:ln w="38100">
             <a:solidFill>
@@ -4535,13 +4768,13 @@
       </p:sp>
       <p:sp>
         <p:nvSpPr>
-          <p:cNvPr id="11" name="TextBox 10"/>
+          <p:cNvPr id="13" name="TextBox 12"/>
           <p:cNvSpPr txBox="1"/>
           <p:nvPr/>
         </p:nvSpPr>
         <p:spPr>
           <a:xfrm>
-            <a:off x="3413683" y="2514600"/>
+            <a:off x="3413683" y="2697480"/>
             <a:ext cx="2636443" cy="457200"/>
           </a:xfrm>
           <a:prstGeom prst="rect">
@@ -4563,7 +4796,7 @@
             <a:r>
               <a:rPr sz="1600" b="1" i="0">
                 <a:solidFill>
-                  <a:srgbClr val="C49645"/>
+                  <a:srgbClr val="E1C698"/>
                 </a:solidFill>
               </a:rPr>
               <a:t>출산</a:t>
@@ -4573,13 +4806,13 @@
       </p:sp>
       <p:sp>
         <p:nvSpPr>
-          <p:cNvPr id="12" name="TextBox 11"/>
+          <p:cNvPr id="14" name="TextBox 13"/>
           <p:cNvSpPr txBox="1"/>
           <p:nvPr/>
         </p:nvSpPr>
         <p:spPr>
           <a:xfrm>
-            <a:off x="3459403" y="3703320"/>
+            <a:off x="3459403" y="3886200"/>
             <a:ext cx="2545003" cy="457200"/>
           </a:xfrm>
           <a:prstGeom prst="rect">
@@ -4601,7 +4834,7 @@
             <a:r>
               <a:rPr sz="1800" b="1" i="0">
                 <a:solidFill>
-                  <a:srgbClr val="7C5D27"/>
+                  <a:srgbClr val="493D27"/>
                 </a:solidFill>
               </a:rPr>
               <a:t>태어난 날</a:t>
@@ -4611,13 +4844,13 @@
       </p:sp>
       <p:sp>
         <p:nvSpPr>
-          <p:cNvPr id="13" name="TextBox 12"/>
+          <p:cNvPr id="15" name="TextBox 14"/>
           <p:cNvSpPr txBox="1"/>
           <p:nvPr/>
         </p:nvSpPr>
         <p:spPr>
           <a:xfrm>
-            <a:off x="3459403" y="4206240"/>
+            <a:off x="3459403" y="4389120"/>
             <a:ext cx="2545003" cy="1645920"/>
           </a:xfrm>
           <a:prstGeom prst="rect">
@@ -4639,7 +4872,7 @@
             <a:r>
               <a:rPr sz="1500" b="0" i="0">
                 <a:solidFill>
-                  <a:srgbClr val="2B2B2B"/>
+                  <a:srgbClr val="26231F"/>
                 </a:solidFill>
               </a:rPr>
               <a:t>기억을 적어 주세요</a:t>
@@ -4649,20 +4882,20 @@
       </p:sp>
       <p:sp>
         <p:nvSpPr>
-          <p:cNvPr id="14" name="때 3"/>
+          <p:cNvPr id="16" name="때 3"/>
           <p:cNvSpPr/>
           <p:nvPr/>
         </p:nvSpPr>
         <p:spPr>
           <a:xfrm>
-            <a:off x="7258621" y="3154680"/>
+            <a:off x="7258621" y="3337560"/>
             <a:ext cx="402336" cy="402336"/>
           </a:xfrm>
           <a:prstGeom prst="ellipse">
             <a:avLst/>
           </a:prstGeom>
           <a:solidFill>
-            <a:srgbClr val="C49645"/>
+            <a:srgbClr val="E1C698"/>
           </a:solidFill>
           <a:ln w="38100">
             <a:solidFill>
@@ -4680,13 +4913,13 @@
       </p:sp>
       <p:sp>
         <p:nvSpPr>
-          <p:cNvPr id="15" name="TextBox 14"/>
+          <p:cNvPr id="17" name="TextBox 16"/>
           <p:cNvSpPr txBox="1"/>
           <p:nvPr/>
         </p:nvSpPr>
         <p:spPr>
           <a:xfrm>
-            <a:off x="6141567" y="2514600"/>
+            <a:off x="6141567" y="2697480"/>
             <a:ext cx="2636443" cy="457200"/>
           </a:xfrm>
           <a:prstGeom prst="rect">
@@ -4708,7 +4941,7 @@
             <a:r>
               <a:rPr sz="1600" b="1" i="0">
                 <a:solidFill>
-                  <a:srgbClr val="C49645"/>
+                  <a:srgbClr val="E1C698"/>
                 </a:solidFill>
               </a:rPr>
               <a:t>첫 만남</a:t>
@@ -4718,13 +4951,13 @@
       </p:sp>
       <p:sp>
         <p:nvSpPr>
-          <p:cNvPr id="16" name="TextBox 15"/>
+          <p:cNvPr id="18" name="TextBox 17"/>
           <p:cNvSpPr txBox="1"/>
           <p:nvPr/>
         </p:nvSpPr>
         <p:spPr>
           <a:xfrm>
-            <a:off x="6187287" y="3703320"/>
+            <a:off x="6187287" y="3886200"/>
             <a:ext cx="2545003" cy="457200"/>
           </a:xfrm>
           <a:prstGeom prst="rect">
@@ -4746,7 +4979,7 @@
             <a:r>
               <a:rPr sz="1800" b="1" i="0">
                 <a:solidFill>
-                  <a:srgbClr val="7C5D27"/>
+                  <a:srgbClr val="493D27"/>
                 </a:solidFill>
               </a:rPr>
               <a:t>품에 안은 순간</a:t>
@@ -4756,13 +4989,13 @@
       </p:sp>
       <p:sp>
         <p:nvSpPr>
-          <p:cNvPr id="17" name="TextBox 16"/>
+          <p:cNvPr id="19" name="TextBox 18"/>
           <p:cNvSpPr txBox="1"/>
           <p:nvPr/>
         </p:nvSpPr>
         <p:spPr>
           <a:xfrm>
-            <a:off x="6187287" y="4206240"/>
+            <a:off x="6187287" y="4389120"/>
             <a:ext cx="2545003" cy="1645920"/>
           </a:xfrm>
           <a:prstGeom prst="rect">
@@ -4784,7 +5017,7 @@
             <a:r>
               <a:rPr sz="1500" b="0" i="0">
                 <a:solidFill>
-                  <a:srgbClr val="2B2B2B"/>
+                  <a:srgbClr val="26231F"/>
                 </a:solidFill>
               </a:rPr>
               <a:t>기억을 적어 주세요</a:t>
@@ -4794,20 +5027,20 @@
       </p:sp>
       <p:sp>
         <p:nvSpPr>
-          <p:cNvPr id="18" name="때 4"/>
+          <p:cNvPr id="20" name="때 4"/>
           <p:cNvSpPr/>
           <p:nvPr/>
         </p:nvSpPr>
         <p:spPr>
           <a:xfrm>
-            <a:off x="9986505" y="3154680"/>
+            <a:off x="9986505" y="3337560"/>
             <a:ext cx="402336" cy="402336"/>
           </a:xfrm>
           <a:prstGeom prst="ellipse">
             <a:avLst/>
           </a:prstGeom>
           <a:solidFill>
-            <a:srgbClr val="C49645"/>
+            <a:srgbClr val="E1C698"/>
           </a:solidFill>
           <a:ln w="38100">
             <a:solidFill>
@@ -4825,13 +5058,13 @@
       </p:sp>
       <p:sp>
         <p:nvSpPr>
-          <p:cNvPr id="19" name="TextBox 18"/>
+          <p:cNvPr id="21" name="TextBox 20"/>
           <p:cNvSpPr txBox="1"/>
           <p:nvPr/>
         </p:nvSpPr>
         <p:spPr>
           <a:xfrm>
-            <a:off x="8869451" y="2514600"/>
+            <a:off x="8869451" y="2697480"/>
             <a:ext cx="2636443" cy="457200"/>
           </a:xfrm>
           <a:prstGeom prst="rect">
@@ -4853,7 +5086,7 @@
             <a:r>
               <a:rPr sz="1600" b="1" i="0">
                 <a:solidFill>
-                  <a:srgbClr val="C49645"/>
+                  <a:srgbClr val="E1C698"/>
                 </a:solidFill>
               </a:rPr>
               <a:t>집으로</a:t>
@@ -4863,13 +5096,13 @@
       </p:sp>
       <p:sp>
         <p:nvSpPr>
-          <p:cNvPr id="20" name="TextBox 19"/>
+          <p:cNvPr id="22" name="TextBox 21"/>
           <p:cNvSpPr txBox="1"/>
           <p:nvPr/>
         </p:nvSpPr>
         <p:spPr>
           <a:xfrm>
-            <a:off x="8915171" y="3703320"/>
+            <a:off x="8915171" y="3886200"/>
             <a:ext cx="2545003" cy="457200"/>
           </a:xfrm>
           <a:prstGeom prst="rect">
@@ -4891,7 +5124,7 @@
             <a:r>
               <a:rPr sz="1800" b="1" i="0">
                 <a:solidFill>
-                  <a:srgbClr val="7C5D27"/>
+                  <a:srgbClr val="493D27"/>
                 </a:solidFill>
               </a:rPr>
               <a:t>함께 돌아온 날</a:t>
@@ -4901,13 +5134,13 @@
       </p:sp>
       <p:sp>
         <p:nvSpPr>
-          <p:cNvPr id="21" name="TextBox 20"/>
+          <p:cNvPr id="23" name="TextBox 22"/>
           <p:cNvSpPr txBox="1"/>
           <p:nvPr/>
         </p:nvSpPr>
         <p:spPr>
           <a:xfrm>
-            <a:off x="8915171" y="4206240"/>
+            <a:off x="8915171" y="4389120"/>
             <a:ext cx="2545003" cy="1645920"/>
           </a:xfrm>
           <a:prstGeom prst="rect">
@@ -4929,7 +5162,7 @@
             <a:r>
               <a:rPr sz="1500" b="0" i="0">
                 <a:solidFill>
-                  <a:srgbClr val="2B2B2B"/>
+                  <a:srgbClr val="26231F"/>
                 </a:solidFill>
               </a:rPr>
               <a:t>기억을 적어 주세요</a:t>
@@ -4951,7 +5184,7 @@
     <p:bg>
       <p:bgPr>
         <a:solidFill>
-          <a:srgbClr val="FAF6EF"/>
+          <a:srgbClr val="FFFFFF"/>
         </a:solidFill>
         <a:effectLst/>
       </p:bgPr>
@@ -4971,14 +5204,14 @@
         </p:nvSpPr>
         <p:spPr>
           <a:xfrm>
-            <a:off x="0" y="0"/>
-            <a:ext cx="12191695" cy="274320"/>
+            <a:off x="0" y="6565392"/>
+            <a:ext cx="12191695" cy="292608"/>
           </a:xfrm>
           <a:prstGeom prst="rect">
             <a:avLst/>
           </a:prstGeom>
           <a:solidFill>
-            <a:srgbClr val="C49645"/>
+            <a:srgbClr val="EBD4AD"/>
           </a:solidFill>
           <a:ln>
             <a:noFill/>
@@ -5000,14 +5233,83 @@
         </p:nvSpPr>
         <p:spPr>
           <a:xfrm>
-            <a:off x="0" y="274320"/>
-            <a:ext cx="12191695" cy="54864"/>
+            <a:off x="640080" y="566928"/>
+            <a:ext cx="64008" cy="868680"/>
+          </a:xfrm>
+          <a:prstGeom prst="roundRect">
+            <a:avLst>
+              <a:gd name="adj" fmla="val 50000"/>
+            </a:avLst>
+          </a:prstGeom>
+          <a:solidFill>
+            <a:srgbClr val="E1C698"/>
+          </a:solidFill>
+          <a:ln>
+            <a:noFill/>
+          </a:ln>
+        </p:spPr>
+        <p:txBody>
+          <a:bodyPr rtlCol="0" anchor="ctr"/>
+          <a:lstStyle/>
+          <a:p>
+            <a:pPr algn="ctr"/>
+          </a:p>
+        </p:txBody>
+      </p:sp>
+      <p:sp>
+        <p:nvSpPr>
+          <p:cNvPr id="5" name="상단 라벨"/>
+          <p:cNvSpPr txBox="1"/>
+          <p:nvPr/>
+        </p:nvSpPr>
+        <p:spPr>
+          <a:xfrm>
+            <a:off x="868680" y="274320"/>
+            <a:ext cx="5486400" cy="274320"/>
           </a:xfrm>
           <a:prstGeom prst="rect">
             <a:avLst/>
           </a:prstGeom>
+          <a:noFill/>
+        </p:spPr>
+        <p:txBody>
+          <a:bodyPr wrap="square" lIns="54864" rIns="54864" tIns="27432" bIns="27432" anchor="ctr">
+            <a:noAutofit/>
+          </a:bodyPr>
+          <a:lstStyle/>
+          <a:p>
+            <a:pPr algn="l">
+              <a:lnSpc>
+                <a:spcPct val="115000"/>
+              </a:lnSpc>
+            </a:pPr>
+            <a:r>
+              <a:rPr sz="900" b="1" i="0" spc="250">
+                <a:solidFill>
+                  <a:srgbClr val="8E8780"/>
+                </a:solidFill>
+              </a:rPr>
+              <a:t>FIRST BIRTHDAY</a:t>
+            </a:r>
+          </a:p>
+        </p:txBody>
+      </p:sp>
+      <p:sp>
+        <p:nvSpPr>
+          <p:cNvPr id="6" name="포인트"/>
+          <p:cNvSpPr/>
+          <p:nvPr/>
+        </p:nvSpPr>
+        <p:spPr>
+          <a:xfrm>
+            <a:off x="11167567" y="667512"/>
+            <a:ext cx="310896" cy="310896"/>
+          </a:xfrm>
+          <a:prstGeom prst="sun">
+            <a:avLst/>
+          </a:prstGeom>
           <a:solidFill>
-            <a:srgbClr val="3B8591"/>
+            <a:srgbClr val="EBD4AD"/>
           </a:solidFill>
           <a:ln>
             <a:noFill/>
@@ -5033,8 +5335,8 @@
         </p:nvSpPr>
         <p:spPr>
           <a:xfrm>
-            <a:off x="640080" y="457200"/>
-            <a:ext cx="9722815" cy="868680"/>
+            <a:off x="868680" y="566928"/>
+            <a:ext cx="9448495" cy="868680"/>
           </a:xfrm>
         </p:spPr>
         <p:txBody>
@@ -5051,7 +5353,7 @@
             <a:r>
               <a:rPr sz="3000" b="1" i="0">
                 <a:solidFill>
-                  <a:srgbClr val="7C5D27"/>
+                  <a:srgbClr val="26231F"/>
                 </a:solidFill>
               </a:rPr>
               <a:t>첫 번째 순간들</a:t>
@@ -5061,26 +5363,24 @@
       </p:sp>
       <p:sp>
         <p:nvSpPr>
-          <p:cNvPr id="5" name="카드 1"/>
+          <p:cNvPr id="7" name="카드 1"/>
           <p:cNvSpPr/>
           <p:nvPr/>
         </p:nvSpPr>
         <p:spPr>
           <a:xfrm>
-            <a:off x="640080" y="1600200"/>
-            <a:ext cx="2556433" cy="4800600"/>
+            <a:off x="640080" y="1783080"/>
+            <a:ext cx="2556433" cy="4389120"/>
           </a:xfrm>
           <a:prstGeom prst="roundRect">
             <a:avLst>
-              <a:gd name="adj" fmla="val 8000"/>
+              <a:gd name="adj" fmla="val 7000"/>
             </a:avLst>
           </a:prstGeom>
-          <a:solidFill>
-            <a:srgbClr val="FAF6EF"/>
-          </a:solidFill>
+          <a:noFill/>
           <a:ln w="15875">
             <a:solidFill>
-              <a:srgbClr val="F2E5CF"/>
+              <a:srgbClr val="E1C698"/>
             </a:solidFill>
           </a:ln>
         </p:spPr>
@@ -5094,23 +5394,23 @@
       </p:sp>
       <p:sp>
         <p:nvSpPr>
-          <p:cNvPr id="6" name="번호 1"/>
+          <p:cNvPr id="8" name="번호 1"/>
           <p:cNvSpPr/>
           <p:nvPr/>
         </p:nvSpPr>
         <p:spPr>
           <a:xfrm>
-            <a:off x="822959" y="1783080"/>
+            <a:off x="822959" y="1965960"/>
             <a:ext cx="457200" cy="457200"/>
           </a:xfrm>
           <a:prstGeom prst="ellipse">
             <a:avLst/>
           </a:prstGeom>
-          <a:solidFill>
-            <a:srgbClr val="C49645"/>
-          </a:solidFill>
-          <a:ln>
-            <a:noFill/>
+          <a:noFill/>
+          <a:ln w="19050">
+            <a:solidFill>
+              <a:srgbClr val="E1C698"/>
+            </a:solidFill>
           </a:ln>
         </p:spPr>
         <p:txBody>
@@ -5127,7 +5427,7 @@
             <a:r>
               <a:rPr sz="1600" b="1" i="0">
                 <a:solidFill>
-                  <a:srgbClr val="FFFFFF"/>
+                  <a:srgbClr val="493D27"/>
                 </a:solidFill>
               </a:rPr>
               <a:t>1</a:t>
@@ -5137,13 +5437,13 @@
       </p:sp>
       <p:sp>
         <p:nvSpPr>
-          <p:cNvPr id="7" name="TextBox 6"/>
+          <p:cNvPr id="9" name="TextBox 8"/>
           <p:cNvSpPr txBox="1"/>
           <p:nvPr/>
         </p:nvSpPr>
         <p:spPr>
           <a:xfrm>
-            <a:off x="777240" y="2377440"/>
+            <a:off x="777240" y="2560320"/>
             <a:ext cx="2282113" cy="640080"/>
           </a:xfrm>
           <a:prstGeom prst="rect">
@@ -5165,7 +5465,7 @@
             <a:r>
               <a:rPr sz="1800" b="1" i="0">
                 <a:solidFill>
-                  <a:srgbClr val="7C5D27"/>
+                  <a:srgbClr val="493D27"/>
                 </a:solidFill>
               </a:rPr>
               <a:t>첫 웃음</a:t>
@@ -5175,14 +5475,14 @@
       </p:sp>
       <p:sp>
         <p:nvSpPr>
-          <p:cNvPr id="8" name="TextBox 7"/>
+          <p:cNvPr id="10" name="TextBox 9"/>
           <p:cNvSpPr txBox="1"/>
           <p:nvPr/>
         </p:nvSpPr>
         <p:spPr>
           <a:xfrm>
-            <a:off x="777240" y="3063240"/>
-            <a:ext cx="2282113" cy="3200400"/>
+            <a:off x="777240" y="3246120"/>
+            <a:ext cx="2282113" cy="2788920"/>
           </a:xfrm>
           <a:prstGeom prst="rect">
             <a:avLst/>
@@ -5203,7 +5503,7 @@
             <a:r>
               <a:rPr sz="1500" b="0" i="0">
                 <a:solidFill>
-                  <a:srgbClr val="2B2B2B"/>
+                  <a:srgbClr val="26231F"/>
                 </a:solidFill>
               </a:rPr>
               <a:t>언제였나요?</a:t>
@@ -5213,26 +5513,24 @@
       </p:sp>
       <p:sp>
         <p:nvSpPr>
-          <p:cNvPr id="9" name="카드 2"/>
+          <p:cNvPr id="11" name="카드 2"/>
           <p:cNvSpPr/>
           <p:nvPr/>
         </p:nvSpPr>
         <p:spPr>
           <a:xfrm>
-            <a:off x="3425113" y="1600200"/>
-            <a:ext cx="2556433" cy="4800600"/>
+            <a:off x="3425113" y="1783080"/>
+            <a:ext cx="2556433" cy="4389120"/>
           </a:xfrm>
           <a:prstGeom prst="roundRect">
             <a:avLst>
-              <a:gd name="adj" fmla="val 8000"/>
+              <a:gd name="adj" fmla="val 7000"/>
             </a:avLst>
           </a:prstGeom>
-          <a:solidFill>
-            <a:srgbClr val="FAF6EF"/>
-          </a:solidFill>
+          <a:noFill/>
           <a:ln w="15875">
             <a:solidFill>
-              <a:srgbClr val="F2E5CF"/>
+              <a:srgbClr val="E1C698"/>
             </a:solidFill>
           </a:ln>
         </p:spPr>
@@ -5246,23 +5544,23 @@
       </p:sp>
       <p:sp>
         <p:nvSpPr>
-          <p:cNvPr id="10" name="번호 2"/>
+          <p:cNvPr id="12" name="번호 2"/>
           <p:cNvSpPr/>
           <p:nvPr/>
         </p:nvSpPr>
         <p:spPr>
           <a:xfrm>
-            <a:off x="3607993" y="1783080"/>
+            <a:off x="3607993" y="1965960"/>
             <a:ext cx="457200" cy="457200"/>
           </a:xfrm>
           <a:prstGeom prst="ellipse">
             <a:avLst/>
           </a:prstGeom>
-          <a:solidFill>
-            <a:srgbClr val="C49645"/>
-          </a:solidFill>
-          <a:ln>
-            <a:noFill/>
+          <a:noFill/>
+          <a:ln w="19050">
+            <a:solidFill>
+              <a:srgbClr val="E1C698"/>
+            </a:solidFill>
           </a:ln>
         </p:spPr>
         <p:txBody>
@@ -5279,7 +5577,7 @@
             <a:r>
               <a:rPr sz="1600" b="1" i="0">
                 <a:solidFill>
-                  <a:srgbClr val="FFFFFF"/>
+                  <a:srgbClr val="493D27"/>
                 </a:solidFill>
               </a:rPr>
               <a:t>2</a:t>
@@ -5289,13 +5587,13 @@
       </p:sp>
       <p:sp>
         <p:nvSpPr>
-          <p:cNvPr id="11" name="TextBox 10"/>
+          <p:cNvPr id="13" name="TextBox 12"/>
           <p:cNvSpPr txBox="1"/>
           <p:nvPr/>
         </p:nvSpPr>
         <p:spPr>
           <a:xfrm>
-            <a:off x="3562273" y="2377440"/>
+            <a:off x="3562273" y="2560320"/>
             <a:ext cx="2282113" cy="640080"/>
           </a:xfrm>
           <a:prstGeom prst="rect">
@@ -5317,7 +5615,7 @@
             <a:r>
               <a:rPr sz="1800" b="1" i="0">
                 <a:solidFill>
-                  <a:srgbClr val="7C5D27"/>
+                  <a:srgbClr val="493D27"/>
                 </a:solidFill>
               </a:rPr>
               <a:t>첫 뒤집기</a:t>
@@ -5327,14 +5625,14 @@
       </p:sp>
       <p:sp>
         <p:nvSpPr>
-          <p:cNvPr id="12" name="TextBox 11"/>
+          <p:cNvPr id="14" name="TextBox 13"/>
           <p:cNvSpPr txBox="1"/>
           <p:nvPr/>
         </p:nvSpPr>
         <p:spPr>
           <a:xfrm>
-            <a:off x="3562273" y="3063240"/>
-            <a:ext cx="2282113" cy="3200400"/>
+            <a:off x="3562273" y="3246120"/>
+            <a:ext cx="2282113" cy="2788920"/>
           </a:xfrm>
           <a:prstGeom prst="rect">
             <a:avLst/>
@@ -5355,7 +5653,7 @@
             <a:r>
               <a:rPr sz="1500" b="0" i="0">
                 <a:solidFill>
-                  <a:srgbClr val="2B2B2B"/>
+                  <a:srgbClr val="26231F"/>
                 </a:solidFill>
               </a:rPr>
               <a:t>언제였나요?</a:t>
@@ -5365,26 +5663,24 @@
       </p:sp>
       <p:sp>
         <p:nvSpPr>
-          <p:cNvPr id="13" name="카드 3"/>
+          <p:cNvPr id="15" name="카드 3"/>
           <p:cNvSpPr/>
           <p:nvPr/>
         </p:nvSpPr>
         <p:spPr>
           <a:xfrm>
-            <a:off x="6210147" y="1600200"/>
-            <a:ext cx="2556433" cy="4800600"/>
+            <a:off x="6210147" y="1783080"/>
+            <a:ext cx="2556433" cy="4389120"/>
           </a:xfrm>
           <a:prstGeom prst="roundRect">
             <a:avLst>
-              <a:gd name="adj" fmla="val 8000"/>
+              <a:gd name="adj" fmla="val 7000"/>
             </a:avLst>
           </a:prstGeom>
-          <a:solidFill>
-            <a:srgbClr val="FAF6EF"/>
-          </a:solidFill>
+          <a:noFill/>
           <a:ln w="15875">
             <a:solidFill>
-              <a:srgbClr val="F2E5CF"/>
+              <a:srgbClr val="E1C698"/>
             </a:solidFill>
           </a:ln>
         </p:spPr>
@@ -5398,23 +5694,23 @@
       </p:sp>
       <p:sp>
         <p:nvSpPr>
-          <p:cNvPr id="14" name="번호 3"/>
+          <p:cNvPr id="16" name="번호 3"/>
           <p:cNvSpPr/>
           <p:nvPr/>
         </p:nvSpPr>
         <p:spPr>
           <a:xfrm>
-            <a:off x="6393027" y="1783080"/>
+            <a:off x="6393027" y="1965960"/>
             <a:ext cx="457200" cy="457200"/>
           </a:xfrm>
           <a:prstGeom prst="ellipse">
             <a:avLst/>
           </a:prstGeom>
-          <a:solidFill>
-            <a:srgbClr val="C49645"/>
-          </a:solidFill>
-          <a:ln>
-            <a:noFill/>
+          <a:noFill/>
+          <a:ln w="19050">
+            <a:solidFill>
+              <a:srgbClr val="E1C698"/>
+            </a:solidFill>
           </a:ln>
         </p:spPr>
         <p:txBody>
@@ -5431,7 +5727,7 @@
             <a:r>
               <a:rPr sz="1600" b="1" i="0">
                 <a:solidFill>
-                  <a:srgbClr val="FFFFFF"/>
+                  <a:srgbClr val="493D27"/>
                 </a:solidFill>
               </a:rPr>
               <a:t>3</a:t>
@@ -5441,13 +5737,13 @@
       </p:sp>
       <p:sp>
         <p:nvSpPr>
-          <p:cNvPr id="15" name="TextBox 14"/>
+          <p:cNvPr id="17" name="TextBox 16"/>
           <p:cNvSpPr txBox="1"/>
           <p:nvPr/>
         </p:nvSpPr>
         <p:spPr>
           <a:xfrm>
-            <a:off x="6347307" y="2377440"/>
+            <a:off x="6347307" y="2560320"/>
             <a:ext cx="2282113" cy="640080"/>
           </a:xfrm>
           <a:prstGeom prst="rect">
@@ -5469,7 +5765,7 @@
             <a:r>
               <a:rPr sz="1800" b="1" i="0">
                 <a:solidFill>
-                  <a:srgbClr val="7C5D27"/>
+                  <a:srgbClr val="493D27"/>
                 </a:solidFill>
               </a:rPr>
               <a:t>첫 이</a:t>
@@ -5479,14 +5775,14 @@
       </p:sp>
       <p:sp>
         <p:nvSpPr>
-          <p:cNvPr id="16" name="TextBox 15"/>
+          <p:cNvPr id="18" name="TextBox 17"/>
           <p:cNvSpPr txBox="1"/>
           <p:nvPr/>
         </p:nvSpPr>
         <p:spPr>
           <a:xfrm>
-            <a:off x="6347307" y="3063240"/>
-            <a:ext cx="2282113" cy="3200400"/>
+            <a:off x="6347307" y="3246120"/>
+            <a:ext cx="2282113" cy="2788920"/>
           </a:xfrm>
           <a:prstGeom prst="rect">
             <a:avLst/>
@@ -5507,7 +5803,7 @@
             <a:r>
               <a:rPr sz="1500" b="0" i="0">
                 <a:solidFill>
-                  <a:srgbClr val="2B2B2B"/>
+                  <a:srgbClr val="26231F"/>
                 </a:solidFill>
               </a:rPr>
               <a:t>언제였나요?</a:t>
@@ -5517,26 +5813,24 @@
       </p:sp>
       <p:sp>
         <p:nvSpPr>
-          <p:cNvPr id="17" name="카드 4"/>
+          <p:cNvPr id="19" name="카드 4"/>
           <p:cNvSpPr/>
           <p:nvPr/>
         </p:nvSpPr>
         <p:spPr>
           <a:xfrm>
-            <a:off x="8995181" y="1600200"/>
-            <a:ext cx="2556433" cy="4800600"/>
+            <a:off x="8995181" y="1783080"/>
+            <a:ext cx="2556433" cy="4389120"/>
           </a:xfrm>
           <a:prstGeom prst="roundRect">
             <a:avLst>
-              <a:gd name="adj" fmla="val 8000"/>
+              <a:gd name="adj" fmla="val 7000"/>
             </a:avLst>
           </a:prstGeom>
-          <a:solidFill>
-            <a:srgbClr val="FAF6EF"/>
-          </a:solidFill>
+          <a:noFill/>
           <a:ln w="15875">
             <a:solidFill>
-              <a:srgbClr val="F2E5CF"/>
+              <a:srgbClr val="E1C698"/>
             </a:solidFill>
           </a:ln>
         </p:spPr>
@@ -5550,23 +5844,23 @@
       </p:sp>
       <p:sp>
         <p:nvSpPr>
-          <p:cNvPr id="18" name="번호 4"/>
+          <p:cNvPr id="20" name="번호 4"/>
           <p:cNvSpPr/>
           <p:nvPr/>
         </p:nvSpPr>
         <p:spPr>
           <a:xfrm>
-            <a:off x="9178061" y="1783080"/>
+            <a:off x="9178061" y="1965960"/>
             <a:ext cx="457200" cy="457200"/>
           </a:xfrm>
           <a:prstGeom prst="ellipse">
             <a:avLst/>
           </a:prstGeom>
-          <a:solidFill>
-            <a:srgbClr val="C49645"/>
-          </a:solidFill>
-          <a:ln>
-            <a:noFill/>
+          <a:noFill/>
+          <a:ln w="19050">
+            <a:solidFill>
+              <a:srgbClr val="E1C698"/>
+            </a:solidFill>
           </a:ln>
         </p:spPr>
         <p:txBody>
@@ -5583,7 +5877,7 @@
             <a:r>
               <a:rPr sz="1600" b="1" i="0">
                 <a:solidFill>
-                  <a:srgbClr val="FFFFFF"/>
+                  <a:srgbClr val="493D27"/>
                 </a:solidFill>
               </a:rPr>
               <a:t>4</a:t>
@@ -5593,13 +5887,13 @@
       </p:sp>
       <p:sp>
         <p:nvSpPr>
-          <p:cNvPr id="19" name="TextBox 18"/>
+          <p:cNvPr id="21" name="TextBox 20"/>
           <p:cNvSpPr txBox="1"/>
           <p:nvPr/>
         </p:nvSpPr>
         <p:spPr>
           <a:xfrm>
-            <a:off x="9132341" y="2377440"/>
+            <a:off x="9132341" y="2560320"/>
             <a:ext cx="2282113" cy="640080"/>
           </a:xfrm>
           <a:prstGeom prst="rect">
@@ -5621,7 +5915,7 @@
             <a:r>
               <a:rPr sz="1800" b="1" i="0">
                 <a:solidFill>
-                  <a:srgbClr val="7C5D27"/>
+                  <a:srgbClr val="493D27"/>
                 </a:solidFill>
               </a:rPr>
               <a:t>첫 걸음</a:t>
@@ -5631,14 +5925,14 @@
       </p:sp>
       <p:sp>
         <p:nvSpPr>
-          <p:cNvPr id="20" name="TextBox 19"/>
+          <p:cNvPr id="22" name="TextBox 21"/>
           <p:cNvSpPr txBox="1"/>
           <p:nvPr/>
         </p:nvSpPr>
         <p:spPr>
           <a:xfrm>
-            <a:off x="9132341" y="3063240"/>
-            <a:ext cx="2282113" cy="3200400"/>
+            <a:off x="9132341" y="3246120"/>
+            <a:ext cx="2282113" cy="2788920"/>
           </a:xfrm>
           <a:prstGeom prst="rect">
             <a:avLst/>
@@ -5659,7 +5953,7 @@
             <a:r>
               <a:rPr sz="1500" b="0" i="0">
                 <a:solidFill>
-                  <a:srgbClr val="2B2B2B"/>
+                  <a:srgbClr val="26231F"/>
                 </a:solidFill>
               </a:rPr>
               <a:t>언제였나요?</a:t>
@@ -5681,7 +5975,7 @@
     <p:bg>
       <p:bgPr>
         <a:solidFill>
-          <a:srgbClr val="FAF6EF"/>
+          <a:srgbClr val="FFFFFF"/>
         </a:solidFill>
         <a:effectLst/>
       </p:bgPr>
@@ -5701,14 +5995,14 @@
         </p:nvSpPr>
         <p:spPr>
           <a:xfrm>
-            <a:off x="0" y="0"/>
-            <a:ext cx="12191695" cy="274320"/>
+            <a:off x="0" y="6565392"/>
+            <a:ext cx="12191695" cy="292608"/>
           </a:xfrm>
           <a:prstGeom prst="rect">
             <a:avLst/>
           </a:prstGeom>
           <a:solidFill>
-            <a:srgbClr val="C49645"/>
+            <a:srgbClr val="EBD4AD"/>
           </a:solidFill>
           <a:ln>
             <a:noFill/>
@@ -5730,14 +6024,83 @@
         </p:nvSpPr>
         <p:spPr>
           <a:xfrm>
-            <a:off x="0" y="274320"/>
-            <a:ext cx="12191695" cy="54864"/>
+            <a:off x="640080" y="566928"/>
+            <a:ext cx="64008" cy="868680"/>
+          </a:xfrm>
+          <a:prstGeom prst="roundRect">
+            <a:avLst>
+              <a:gd name="adj" fmla="val 50000"/>
+            </a:avLst>
+          </a:prstGeom>
+          <a:solidFill>
+            <a:srgbClr val="E1C698"/>
+          </a:solidFill>
+          <a:ln>
+            <a:noFill/>
+          </a:ln>
+        </p:spPr>
+        <p:txBody>
+          <a:bodyPr rtlCol="0" anchor="ctr"/>
+          <a:lstStyle/>
+          <a:p>
+            <a:pPr algn="ctr"/>
+          </a:p>
+        </p:txBody>
+      </p:sp>
+      <p:sp>
+        <p:nvSpPr>
+          <p:cNvPr id="5" name="상단 라벨"/>
+          <p:cNvSpPr txBox="1"/>
+          <p:nvPr/>
+        </p:nvSpPr>
+        <p:spPr>
+          <a:xfrm>
+            <a:off x="868680" y="274320"/>
+            <a:ext cx="5486400" cy="274320"/>
           </a:xfrm>
           <a:prstGeom prst="rect">
             <a:avLst/>
           </a:prstGeom>
+          <a:noFill/>
+        </p:spPr>
+        <p:txBody>
+          <a:bodyPr wrap="square" lIns="54864" rIns="54864" tIns="27432" bIns="27432" anchor="ctr">
+            <a:noAutofit/>
+          </a:bodyPr>
+          <a:lstStyle/>
+          <a:p>
+            <a:pPr algn="l">
+              <a:lnSpc>
+                <a:spcPct val="115000"/>
+              </a:lnSpc>
+            </a:pPr>
+            <a:r>
+              <a:rPr sz="900" b="1" i="0" spc="250">
+                <a:solidFill>
+                  <a:srgbClr val="8E8780"/>
+                </a:solidFill>
+              </a:rPr>
+              <a:t>FIRST BIRTHDAY</a:t>
+            </a:r>
+          </a:p>
+        </p:txBody>
+      </p:sp>
+      <p:sp>
+        <p:nvSpPr>
+          <p:cNvPr id="6" name="포인트"/>
+          <p:cNvSpPr/>
+          <p:nvPr/>
+        </p:nvSpPr>
+        <p:spPr>
+          <a:xfrm>
+            <a:off x="11167567" y="667512"/>
+            <a:ext cx="310896" cy="310896"/>
+          </a:xfrm>
+          <a:prstGeom prst="sun">
+            <a:avLst/>
+          </a:prstGeom>
           <a:solidFill>
-            <a:srgbClr val="3B8591"/>
+            <a:srgbClr val="EBD4AD"/>
           </a:solidFill>
           <a:ln>
             <a:noFill/>
@@ -5763,8 +6126,8 @@
         </p:nvSpPr>
         <p:spPr>
           <a:xfrm>
-            <a:off x="640080" y="457200"/>
-            <a:ext cx="9722815" cy="868680"/>
+            <a:off x="868680" y="566928"/>
+            <a:ext cx="9448495" cy="868680"/>
           </a:xfrm>
         </p:spPr>
         <p:txBody>
@@ -5781,7 +6144,7 @@
             <a:r>
               <a:rPr sz="3000" b="1" i="0">
                 <a:solidFill>
-                  <a:srgbClr val="7C5D27"/>
+                  <a:srgbClr val="26231F"/>
                 </a:solidFill>
               </a:rPr>
               <a:t>사진 모음</a:t>
@@ -5791,14 +6154,14 @@
       </p:sp>
       <p:sp>
         <p:nvSpPr>
-          <p:cNvPr id="5" name="사진 자리"/>
+          <p:cNvPr id="7" name="사진 자리"/>
           <p:cNvSpPr/>
           <p:nvPr/>
         </p:nvSpPr>
         <p:spPr>
           <a:xfrm>
-            <a:off x="640080" y="1600200"/>
-            <a:ext cx="2590723" cy="2308860"/>
+            <a:off x="640080" y="1783080"/>
+            <a:ext cx="2590723" cy="2103120"/>
           </a:xfrm>
           <a:prstGeom prst="roundRect">
             <a:avLst>
@@ -5806,12 +6169,10 @@
             </a:avLst>
           </a:prstGeom>
           <a:solidFill>
-            <a:srgbClr val="F2E5CF"/>
+            <a:srgbClr val="F6EAD5"/>
           </a:solidFill>
           <a:ln w="19050">
-            <a:solidFill>
-              <a:srgbClr val="C49645"/>
-            </a:solidFill>
+            <a:noFill/>
             <a:prstDash val="dash"/>
           </a:ln>
         </p:spPr>
@@ -5829,7 +6190,7 @@
             <a:r>
               <a:rPr sz="1200" b="0" i="0">
                 <a:solidFill>
-                  <a:srgbClr val="7C5D27"/>
+                  <a:srgbClr val="8E8780"/>
                 </a:solidFill>
               </a:rPr>
               <a:t>사진 1</a:t>
@@ -5839,14 +6200,14 @@
       </p:sp>
       <p:sp>
         <p:nvSpPr>
-          <p:cNvPr id="6" name="사진 자리"/>
+          <p:cNvPr id="8" name="사진 자리"/>
           <p:cNvSpPr/>
           <p:nvPr/>
         </p:nvSpPr>
         <p:spPr>
           <a:xfrm>
-            <a:off x="3413683" y="1600200"/>
-            <a:ext cx="2590723" cy="2308860"/>
+            <a:off x="3413683" y="1783080"/>
+            <a:ext cx="2590723" cy="2103120"/>
           </a:xfrm>
           <a:prstGeom prst="roundRect">
             <a:avLst>
@@ -5854,12 +6215,10 @@
             </a:avLst>
           </a:prstGeom>
           <a:solidFill>
-            <a:srgbClr val="F2E5CF"/>
+            <a:srgbClr val="F6EAD5"/>
           </a:solidFill>
           <a:ln w="19050">
-            <a:solidFill>
-              <a:srgbClr val="C49645"/>
-            </a:solidFill>
+            <a:noFill/>
             <a:prstDash val="dash"/>
           </a:ln>
         </p:spPr>
@@ -5877,7 +6236,7 @@
             <a:r>
               <a:rPr sz="1200" b="0" i="0">
                 <a:solidFill>
-                  <a:srgbClr val="7C5D27"/>
+                  <a:srgbClr val="8E8780"/>
                 </a:solidFill>
               </a:rPr>
               <a:t>사진 2</a:t>
@@ -5887,14 +6246,14 @@
       </p:sp>
       <p:sp>
         <p:nvSpPr>
-          <p:cNvPr id="7" name="사진 자리"/>
+          <p:cNvPr id="9" name="사진 자리"/>
           <p:cNvSpPr/>
           <p:nvPr/>
         </p:nvSpPr>
         <p:spPr>
           <a:xfrm>
-            <a:off x="6187287" y="1600200"/>
-            <a:ext cx="2590723" cy="2308860"/>
+            <a:off x="6187287" y="1783080"/>
+            <a:ext cx="2590723" cy="2103120"/>
           </a:xfrm>
           <a:prstGeom prst="roundRect">
             <a:avLst>
@@ -5902,12 +6261,10 @@
             </a:avLst>
           </a:prstGeom>
           <a:solidFill>
-            <a:srgbClr val="F2E5CF"/>
+            <a:srgbClr val="F6EAD5"/>
           </a:solidFill>
           <a:ln w="19050">
-            <a:solidFill>
-              <a:srgbClr val="C49645"/>
-            </a:solidFill>
+            <a:noFill/>
             <a:prstDash val="dash"/>
           </a:ln>
         </p:spPr>
@@ -5925,7 +6282,7 @@
             <a:r>
               <a:rPr sz="1200" b="0" i="0">
                 <a:solidFill>
-                  <a:srgbClr val="7C5D27"/>
+                  <a:srgbClr val="8E8780"/>
                 </a:solidFill>
               </a:rPr>
               <a:t>사진 3</a:t>
@@ -5935,14 +6292,14 @@
       </p:sp>
       <p:sp>
         <p:nvSpPr>
-          <p:cNvPr id="8" name="사진 자리"/>
+          <p:cNvPr id="10" name="사진 자리"/>
           <p:cNvSpPr/>
           <p:nvPr/>
         </p:nvSpPr>
         <p:spPr>
           <a:xfrm>
-            <a:off x="8960891" y="1600200"/>
-            <a:ext cx="2590723" cy="2308860"/>
+            <a:off x="8960891" y="1783080"/>
+            <a:ext cx="2590723" cy="2103120"/>
           </a:xfrm>
           <a:prstGeom prst="roundRect">
             <a:avLst>
@@ -5950,12 +6307,10 @@
             </a:avLst>
           </a:prstGeom>
           <a:solidFill>
-            <a:srgbClr val="F2E5CF"/>
+            <a:srgbClr val="F6EAD5"/>
           </a:solidFill>
           <a:ln w="19050">
-            <a:solidFill>
-              <a:srgbClr val="C49645"/>
-            </a:solidFill>
+            <a:noFill/>
             <a:prstDash val="dash"/>
           </a:ln>
         </p:spPr>
@@ -5973,7 +6328,7 @@
             <a:r>
               <a:rPr sz="1200" b="0" i="0">
                 <a:solidFill>
-                  <a:srgbClr val="7C5D27"/>
+                  <a:srgbClr val="8E8780"/>
                 </a:solidFill>
               </a:rPr>
               <a:t>사진 4</a:t>
@@ -5983,14 +6338,14 @@
       </p:sp>
       <p:sp>
         <p:nvSpPr>
-          <p:cNvPr id="9" name="사진 자리"/>
+          <p:cNvPr id="11" name="사진 자리"/>
           <p:cNvSpPr/>
           <p:nvPr/>
         </p:nvSpPr>
         <p:spPr>
           <a:xfrm>
-            <a:off x="640080" y="4091939"/>
-            <a:ext cx="2590723" cy="2308860"/>
+            <a:off x="640080" y="4069080"/>
+            <a:ext cx="2590723" cy="2103120"/>
           </a:xfrm>
           <a:prstGeom prst="roundRect">
             <a:avLst>
@@ -5998,12 +6353,10 @@
             </a:avLst>
           </a:prstGeom>
           <a:solidFill>
-            <a:srgbClr val="F2E5CF"/>
+            <a:srgbClr val="F6EAD5"/>
           </a:solidFill>
           <a:ln w="19050">
-            <a:solidFill>
-              <a:srgbClr val="C49645"/>
-            </a:solidFill>
+            <a:noFill/>
             <a:prstDash val="dash"/>
           </a:ln>
         </p:spPr>
@@ -6021,7 +6374,7 @@
             <a:r>
               <a:rPr sz="1200" b="0" i="0">
                 <a:solidFill>
-                  <a:srgbClr val="7C5D27"/>
+                  <a:srgbClr val="8E8780"/>
                 </a:solidFill>
               </a:rPr>
               <a:t>사진 5</a:t>
@@ -6031,14 +6384,14 @@
       </p:sp>
       <p:sp>
         <p:nvSpPr>
-          <p:cNvPr id="10" name="사진 자리"/>
+          <p:cNvPr id="12" name="사진 자리"/>
           <p:cNvSpPr/>
           <p:nvPr/>
         </p:nvSpPr>
         <p:spPr>
           <a:xfrm>
-            <a:off x="3413683" y="4091939"/>
-            <a:ext cx="2590723" cy="2308860"/>
+            <a:off x="3413683" y="4069080"/>
+            <a:ext cx="2590723" cy="2103120"/>
           </a:xfrm>
           <a:prstGeom prst="roundRect">
             <a:avLst>
@@ -6046,12 +6399,10 @@
             </a:avLst>
           </a:prstGeom>
           <a:solidFill>
-            <a:srgbClr val="F2E5CF"/>
+            <a:srgbClr val="F6EAD5"/>
           </a:solidFill>
           <a:ln w="19050">
-            <a:solidFill>
-              <a:srgbClr val="C49645"/>
-            </a:solidFill>
+            <a:noFill/>
             <a:prstDash val="dash"/>
           </a:ln>
         </p:spPr>
@@ -6069,7 +6420,7 @@
             <a:r>
               <a:rPr sz="1200" b="0" i="0">
                 <a:solidFill>
-                  <a:srgbClr val="7C5D27"/>
+                  <a:srgbClr val="8E8780"/>
                 </a:solidFill>
               </a:rPr>
               <a:t>사진 6</a:t>
@@ -6079,14 +6430,14 @@
       </p:sp>
       <p:sp>
         <p:nvSpPr>
-          <p:cNvPr id="11" name="사진 자리"/>
+          <p:cNvPr id="13" name="사진 자리"/>
           <p:cNvSpPr/>
           <p:nvPr/>
         </p:nvSpPr>
         <p:spPr>
           <a:xfrm>
-            <a:off x="6187287" y="4091939"/>
-            <a:ext cx="2590723" cy="2308860"/>
+            <a:off x="6187287" y="4069080"/>
+            <a:ext cx="2590723" cy="2103120"/>
           </a:xfrm>
           <a:prstGeom prst="roundRect">
             <a:avLst>
@@ -6094,12 +6445,10 @@
             </a:avLst>
           </a:prstGeom>
           <a:solidFill>
-            <a:srgbClr val="F2E5CF"/>
+            <a:srgbClr val="F6EAD5"/>
           </a:solidFill>
           <a:ln w="19050">
-            <a:solidFill>
-              <a:srgbClr val="C49645"/>
-            </a:solidFill>
+            <a:noFill/>
             <a:prstDash val="dash"/>
           </a:ln>
         </p:spPr>
@@ -6117,7 +6466,7 @@
             <a:r>
               <a:rPr sz="1200" b="0" i="0">
                 <a:solidFill>
-                  <a:srgbClr val="7C5D27"/>
+                  <a:srgbClr val="8E8780"/>
                 </a:solidFill>
               </a:rPr>
               <a:t>사진 7</a:t>
@@ -6127,14 +6476,14 @@
       </p:sp>
       <p:sp>
         <p:nvSpPr>
-          <p:cNvPr id="12" name="사진 자리"/>
+          <p:cNvPr id="14" name="사진 자리"/>
           <p:cNvSpPr/>
           <p:nvPr/>
         </p:nvSpPr>
         <p:spPr>
           <a:xfrm>
-            <a:off x="8960891" y="4091939"/>
-            <a:ext cx="2590723" cy="2308860"/>
+            <a:off x="8960891" y="4069080"/>
+            <a:ext cx="2590723" cy="2103120"/>
           </a:xfrm>
           <a:prstGeom prst="roundRect">
             <a:avLst>
@@ -6142,12 +6491,10 @@
             </a:avLst>
           </a:prstGeom>
           <a:solidFill>
-            <a:srgbClr val="F2E5CF"/>
+            <a:srgbClr val="F6EAD5"/>
           </a:solidFill>
           <a:ln w="19050">
-            <a:solidFill>
-              <a:srgbClr val="C49645"/>
-            </a:solidFill>
+            <a:noFill/>
             <a:prstDash val="dash"/>
           </a:ln>
         </p:spPr>
@@ -6165,7 +6512,7 @@
             <a:r>
               <a:rPr sz="1200" b="0" i="0">
                 <a:solidFill>
-                  <a:srgbClr val="7C5D27"/>
+                  <a:srgbClr val="8E8780"/>
                 </a:solidFill>
               </a:rPr>
               <a:t>사진 8</a:t>
@@ -6184,6 +6531,14 @@
 <file path=ppt/slides/slide6.xml><?xml version="1.0" encoding="utf-8"?>
 <p:sld xmlns:a="http://schemas.openxmlformats.org/drawingml/2006/main" xmlns:p="http://schemas.openxmlformats.org/presentationml/2006/main" xmlns:r="http://schemas.openxmlformats.org/officeDocument/2006/relationships">
   <p:cSld>
+    <p:bg>
+      <p:bgPr>
+        <a:solidFill>
+          <a:srgbClr val="F6EAD5"/>
+        </a:solidFill>
+        <a:effectLst/>
+      </p:bgPr>
+    </p:bg>
     <p:spTree>
       <p:nvGrpSpPr>
         <p:cNvPr id="1" name=""/>
@@ -6191,30 +6546,119 @@
         <p:nvPr/>
       </p:nvGrpSpPr>
       <p:grpSpPr/>
-      <p:pic>
-        <p:nvPicPr>
-          <p:cNvPr id="3" name="표지 그림" descr="birthday-45.jpg"/>
-          <p:cNvPicPr>
-            <a:picLocks noChangeAspect="1"/>
-          </p:cNvPicPr>
+      <p:sp>
+        <p:nvSpPr>
+          <p:cNvPr id="3" name="사진 자리"/>
+          <p:cNvSpPr/>
           <p:nvPr/>
-        </p:nvPicPr>
-        <p:blipFill>
-          <a:blip r:embed="rId2"/>
-          <a:stretch>
-            <a:fillRect/>
-          </a:stretch>
-        </p:blipFill>
-        <p:spPr>
-          <a:xfrm>
-            <a:off x="0" y="0"/>
-            <a:ext cx="12191695" cy="6858000"/>
+        </p:nvSpPr>
+        <p:spPr>
+          <a:xfrm>
+            <a:off x="7558851" y="685800"/>
+            <a:ext cx="3169840" cy="5486400"/>
+          </a:xfrm>
+          <a:prstGeom prst="round2SameRect">
+            <a:avLst>
+              <a:gd name="adj1" fmla="val 50000"/>
+              <a:gd name="adj2" fmla="val 0"/>
+            </a:avLst>
+          </a:prstGeom>
+          <a:solidFill>
+            <a:srgbClr val="EBD4AD"/>
+          </a:solidFill>
+          <a:ln>
+            <a:noFill/>
+          </a:ln>
+        </p:spPr>
+        <p:txBody>
+          <a:bodyPr rtlCol="0" anchor="ctr" wrap="square" lIns="54864" rIns="54864" tIns="27432" bIns="27432">
+            <a:noAutofit/>
+          </a:bodyPr>
+          <a:lstStyle/>
+          <a:p>
+            <a:pPr algn="ctr">
+              <a:lnSpc>
+                <a:spcPct val="100000"/>
+              </a:lnSpc>
+            </a:pPr>
+            <a:r>
+              <a:rPr sz="1400" b="0" i="0">
+                <a:solidFill>
+                  <a:srgbClr val="493D27"/>
+                </a:solidFill>
+              </a:rPr>
+              <a:t>사진을 넣어 주세요</a:t>
+            </a:r>
+          </a:p>
+        </p:txBody>
+      </p:sp>
+      <p:sp>
+        <p:nvSpPr>
+          <p:cNvPr id="4" name="장식"/>
+          <p:cNvSpPr/>
+          <p:nvPr/>
+        </p:nvSpPr>
+        <p:spPr>
+          <a:xfrm>
+            <a:off x="6827349" y="4251960"/>
+            <a:ext cx="1005840" cy="1005840"/>
+          </a:xfrm>
+          <a:prstGeom prst="ellipse">
+            <a:avLst/>
+          </a:prstGeom>
+          <a:solidFill>
+            <a:srgbClr val="EBD4AD"/>
+          </a:solidFill>
+          <a:ln>
+            <a:noFill/>
+          </a:ln>
+        </p:spPr>
+        <p:txBody>
+          <a:bodyPr rtlCol="0" anchor="ctr"/>
+          <a:lstStyle/>
+          <a:p>
+            <a:pPr algn="ctr"/>
+          </a:p>
+        </p:txBody>
+      </p:sp>
+      <p:sp>
+        <p:nvSpPr>
+          <p:cNvPr id="5" name="라벨"/>
+          <p:cNvSpPr txBox="1"/>
+          <p:nvPr/>
+        </p:nvSpPr>
+        <p:spPr>
+          <a:xfrm>
+            <a:off x="822960" y="2148840"/>
+            <a:ext cx="5608179" cy="274320"/>
           </a:xfrm>
           <a:prstGeom prst="rect">
             <a:avLst/>
           </a:prstGeom>
-        </p:spPr>
-      </p:pic>
+          <a:noFill/>
+        </p:spPr>
+        <p:txBody>
+          <a:bodyPr wrap="square" lIns="54864" rIns="54864" tIns="27432" bIns="27432" anchor="t">
+            <a:noAutofit/>
+          </a:bodyPr>
+          <a:lstStyle/>
+          <a:p>
+            <a:pPr algn="l">
+              <a:lnSpc>
+                <a:spcPct val="115000"/>
+              </a:lnSpc>
+            </a:pPr>
+            <a:r>
+              <a:rPr sz="1000" b="1" i="0" spc="250">
+                <a:solidFill>
+                  <a:srgbClr val="26231F"/>
+                </a:solidFill>
+              </a:rPr>
+              <a:t>FIRST BIRTHDAY</a:t>
+            </a:r>
+          </a:p>
+        </p:txBody>
+      </p:sp>
       <p:sp>
         <p:nvSpPr>
           <p:cNvPr id="2" name="Title 1"/>
@@ -6227,8 +6671,8 @@
         </p:nvSpPr>
         <p:spPr>
           <a:xfrm>
-            <a:off x="853418" y="2057400"/>
-            <a:ext cx="6095847" cy="1554480"/>
+            <a:off x="822960" y="2606040"/>
+            <a:ext cx="5608179" cy="1188720"/>
           </a:xfrm>
         </p:spPr>
         <p:txBody>
@@ -6245,7 +6689,7 @@
             <a:r>
               <a:rPr sz="3400" b="1" i="0">
                 <a:solidFill>
-                  <a:srgbClr val="7C5D27"/>
+                  <a:srgbClr val="26231F"/>
                 </a:solidFill>
               </a:rPr>
               <a:t>와 주셔서 고맙습니다</a:t>
@@ -6255,14 +6699,14 @@
       </p:sp>
       <p:sp>
         <p:nvSpPr>
-          <p:cNvPr id="4" name="한 줄 문구"/>
+          <p:cNvPr id="6" name="한 줄 문구"/>
           <p:cNvSpPr txBox="1"/>
           <p:nvPr/>
         </p:nvSpPr>
         <p:spPr>
           <a:xfrm>
-            <a:off x="853418" y="3749039"/>
-            <a:ext cx="6095847" cy="822960"/>
+            <a:off x="822960" y="3886200"/>
+            <a:ext cx="5608179" cy="822960"/>
           </a:xfrm>
           <a:prstGeom prst="rect">
             <a:avLst/>
@@ -6281,9 +6725,9 @@
               </a:lnSpc>
             </a:pPr>
             <a:r>
-              <a:rPr sz="1700" b="0" i="1">
-                <a:solidFill>
-                  <a:srgbClr val="7C5D27"/>
+              <a:rPr sz="1700" b="0" i="0">
+                <a:solidFill>
+                  <a:srgbClr val="26231F"/>
                 </a:solidFill>
               </a:rPr>
               <a:t>아이가 한 살이 되었습니다</a:t>
@@ -6293,14 +6737,14 @@
       </p:sp>
       <p:sp>
         <p:nvSpPr>
-          <p:cNvPr id="5" name="안내 문구"/>
+          <p:cNvPr id="7" name="안내 문구"/>
           <p:cNvSpPr txBox="1"/>
           <p:nvPr/>
         </p:nvSpPr>
         <p:spPr>
           <a:xfrm>
-            <a:off x="853418" y="4617720"/>
-            <a:ext cx="6095847" cy="914400"/>
+            <a:off x="822960" y="4754880"/>
+            <a:ext cx="5608179" cy="914400"/>
           </a:xfrm>
           <a:prstGeom prst="rect">
             <a:avLst/>
@@ -6321,7 +6765,7 @@
             <a:r>
               <a:rPr sz="1400" b="0" i="0">
                 <a:solidFill>
-                  <a:srgbClr val="666666"/>
+                  <a:srgbClr val="26231F"/>
                 </a:solidFill>
               </a:rPr>
               <a:t>아기 이름 · 부모 이름</a:t>
@@ -6348,34 +6792,34 @@
         <a:sysClr val="window" lastClr="FFFFFF"/>
       </a:lt1>
       <a:dk2>
-        <a:srgbClr val="7C5D27"/>
+        <a:srgbClr val="493D27"/>
       </a:dk2>
       <a:lt2>
-        <a:srgbClr val="FAF6EF"/>
+        <a:srgbClr val="FBF6EC"/>
       </a:lt2>
       <a:accent1>
-        <a:srgbClr val="C49645"/>
+        <a:srgbClr val="E1C698"/>
       </a:accent1>
       <a:accent2>
-        <a:srgbClr val="3B8591"/>
+        <a:srgbClr val="E5EAB8"/>
       </a:accent2>
       <a:accent3>
-        <a:srgbClr val="7C5D27"/>
+        <a:srgbClr val="493D27"/>
       </a:accent3>
       <a:accent4>
-        <a:srgbClr val="F2E5CF"/>
+        <a:srgbClr val="F6EAD5"/>
       </a:accent4>
       <a:accent5>
-        <a:srgbClr val="808E6B"/>
+        <a:srgbClr val="E3D8A8"/>
       </a:accent5>
       <a:accent6>
-        <a:srgbClr val="B09E7D"/>
+        <a:srgbClr val="928B7D"/>
       </a:accent6>
       <a:hlink>
-        <a:srgbClr val="C49645"/>
+        <a:srgbClr val="E1C698"/>
       </a:hlink>
       <a:folHlink>
-        <a:srgbClr val="7C5D27"/>
+        <a:srgbClr val="493D27"/>
       </a:folHlink>
     </a:clrScheme>
     <a:fontScheme name="Office">
